--- a/media/exports/reports/2026-09/runway.pptx
+++ b/media/exports/reports/2026-09/runway.pptx
@@ -617,7 +617,9 @@
     <a:lstStyle/>
     <a:p>
       <a:pPr>
-        <a:defRPr sz="1800"/>
+        <a:defRPr sz="1800">
+          <a:latin typeface="Roboto"/>
+        </a:defRPr>
       </a:pPr>
       <a:endParaRPr/>
     </a:p>
@@ -3648,11 +3650,17 @@
           <a:bodyPr rtlCol="0" anchor="ctr"/>
           <a:lstStyle/>
           <a:p>
+            <a:pPr>
+              <a:defRPr>
+                <a:latin typeface="Roboto"/>
+              </a:defRPr>
+            </a:pPr>
             <a:r>
               <a:rPr sz="1600" b="1">
                 <a:solidFill>
                   <a:srgbClr val="FFFFFF"/>
                 </a:solidFill>
+                <a:latin typeface="Roboto"/>
               </a:rPr>
               <a:t>4th</a:t>
             </a:r>
@@ -3681,14 +3689,19 @@
           </a:bodyPr>
           <a:lstStyle/>
           <a:p>
+            <a:pPr>
+              <a:defRPr>
+                <a:latin typeface="Roboto"/>
+              </a:defRPr>
+            </a:pPr>
             <a:r>
               <a:rPr sz="1800" b="1">
                 <a:solidFill>
                   <a:srgbClr val="25342A"/>
                 </a:solidFill>
-                <a:latin typeface="Arial"/>
+                <a:latin typeface="Roboto"/>
               </a:rPr>
-              <a:t>The 4th Sheet</a:t>
+              <a:t>The Fourth Sheet</a:t>
             </a:r>
           </a:p>
         </p:txBody>
@@ -3715,12 +3728,17 @@
           </a:bodyPr>
           <a:lstStyle/>
           <a:p>
+            <a:pPr>
+              <a:defRPr>
+                <a:latin typeface="Roboto"/>
+              </a:defRPr>
+            </a:pPr>
             <a:r>
               <a:rPr sz="1100" b="1">
                 <a:solidFill>
                   <a:srgbClr val="8A7A52"/>
                 </a:solidFill>
-                <a:latin typeface="Arial"/>
+                <a:latin typeface="Roboto"/>
               </a:rPr>
               <a:t>SAMPLE DATA · invented figures for demonstration</a:t>
             </a:r>
@@ -3749,12 +3767,17 @@
           </a:bodyPr>
           <a:lstStyle/>
           <a:p>
+            <a:pPr>
+              <a:defRPr>
+                <a:latin typeface="Roboto"/>
+              </a:defRPr>
+            </a:pPr>
             <a:r>
               <a:rPr sz="3400" b="1">
                 <a:solidFill>
                   <a:srgbClr val="25342A"/>
                 </a:solidFill>
-                <a:latin typeface="Arial"/>
+                <a:latin typeface="Roboto"/>
               </a:rPr>
               <a:t>How many months of runway do we have?</a:t>
             </a:r>
@@ -3783,12 +3806,17 @@
           </a:bodyPr>
           <a:lstStyle/>
           <a:p>
+            <a:pPr>
+              <a:defRPr>
+                <a:latin typeface="Roboto"/>
+              </a:defRPr>
+            </a:pPr>
             <a:r>
               <a:rPr sz="1600" b="0">
                 <a:solidFill>
                   <a:srgbClr val="5F6F63"/>
                 </a:solidFill>
-                <a:latin typeface="Arial"/>
+                <a:latin typeface="Roboto"/>
               </a:rPr>
               <a:t>Sample Community Services Ltd</a:t>
             </a:r>
@@ -3817,12 +3845,17 @@
           </a:bodyPr>
           <a:lstStyle/>
           <a:p>
+            <a:pPr>
+              <a:defRPr>
+                <a:latin typeface="Roboto"/>
+              </a:defRPr>
+            </a:pPr>
             <a:r>
               <a:rPr sz="1400" b="0">
                 <a:solidFill>
                   <a:srgbClr val="25342A"/>
                 </a:solidFill>
-                <a:latin typeface="Arial"/>
+                <a:latin typeface="Roboto"/>
               </a:rPr>
               <a:t>Period: September 2026. How long the organisation could keep going on its own money: cash at bank, less unspent grant money (which belongs to the funders' programs), divided by a month's spending.</a:t>
             </a:r>
@@ -3851,45 +3884,65 @@
           </a:bodyPr>
           <a:lstStyle/>
           <a:p>
+            <a:pPr>
+              <a:defRPr>
+                <a:latin typeface="Roboto"/>
+              </a:defRPr>
+            </a:pPr>
             <a:r>
               <a:rPr sz="1100" b="0">
                 <a:solidFill>
                   <a:srgbClr val="5F6F63"/>
                 </a:solidFill>
-                <a:latin typeface="Arial"/>
+                <a:latin typeface="Roboto"/>
               </a:rPr>
               <a:t>How final is this data?</a:t>
             </a:r>
           </a:p>
           <a:p>
+            <a:pPr>
+              <a:defRPr>
+                <a:latin typeface="Roboto"/>
+              </a:defRPr>
+            </a:pPr>
             <a:r>
               <a:rPr sz="1100" b="0">
                 <a:solidFill>
                   <a:srgbClr val="5F6F63"/>
                 </a:solidFill>
-                <a:latin typeface="Arial"/>
+                <a:latin typeface="Roboto"/>
               </a:rPr>
               <a:t>August 2026: Locked. August 2026 is locked (closed 2 Sep 2026). These numbers won't change.</a:t>
             </a:r>
           </a:p>
           <a:p>
+            <a:pPr>
+              <a:defRPr>
+                <a:latin typeface="Roboto"/>
+              </a:defRPr>
+            </a:pPr>
             <a:r>
               <a:rPr sz="1100" b="0">
                 <a:solidFill>
                   <a:srgbClr val="5F6F63"/>
                 </a:solidFill>
-                <a:latin typeface="Arial"/>
+                <a:latin typeface="Roboto"/>
               </a:rPr>
               <a:t>September 2026: Locked. September 2026 is locked (closed 2 Oct 2026). These numbers won't change.</a:t>
             </a:r>
           </a:p>
           <a:p>
+            <a:pPr>
+              <a:defRPr>
+                <a:latin typeface="Roboto"/>
+              </a:defRPr>
+            </a:pPr>
             <a:r>
               <a:rPr sz="1100" b="0">
                 <a:solidFill>
                   <a:srgbClr val="5F6F63"/>
                 </a:solidFill>
-                <a:latin typeface="Arial"/>
+                <a:latin typeface="Roboto"/>
               </a:rPr>
               <a:t>October 2026: Incomplete. October 2026 is still in progress: figures to 6 Oct only.</a:t>
             </a:r>
@@ -3918,12 +3971,17 @@
           </a:bodyPr>
           <a:lstStyle/>
           <a:p>
+            <a:pPr>
+              <a:defRPr>
+                <a:latin typeface="Roboto"/>
+              </a:defRPr>
+            </a:pPr>
             <a:r>
               <a:rPr sz="900" b="0">
                 <a:solidFill>
                   <a:srgbClr val="5F6F63"/>
                 </a:solidFill>
-                <a:latin typeface="Arial"/>
+                <a:latin typeface="Roboto"/>
               </a:rPr>
               <a:t>runway.pptx</a:t>
             </a:r>
@@ -3952,13 +4010,17 @@
           </a:bodyPr>
           <a:lstStyle/>
           <a:p>
-            <a:pPr algn="ctr"/>
+            <a:pPr algn="ctr">
+              <a:defRPr>
+                <a:latin typeface="Roboto"/>
+              </a:defRPr>
+            </a:pPr>
             <a:r>
               <a:rPr sz="900" b="0">
                 <a:solidFill>
                   <a:srgbClr val="5F6F63"/>
                 </a:solidFill>
-                <a:latin typeface="Arial"/>
+                <a:latin typeface="Roboto"/>
               </a:rPr>
               <a:t>Data retrieved 2pm, Tue 6 Oct 2026 · Sample data</a:t>
             </a:r>
@@ -3987,13 +4049,17 @@
           </a:bodyPr>
           <a:lstStyle/>
           <a:p>
-            <a:pPr algn="r"/>
+            <a:pPr algn="r">
+              <a:defRPr>
+                <a:latin typeface="Roboto"/>
+              </a:defRPr>
+            </a:pPr>
             <a:r>
               <a:rPr sz="900" b="0">
                 <a:solidFill>
                   <a:srgbClr val="5F6F63"/>
                 </a:solidFill>
-                <a:latin typeface="Arial"/>
+                <a:latin typeface="Roboto"/>
               </a:rPr>
               <a:t>Slide 1 of 4</a:t>
             </a:r>
@@ -4057,7 +4123,11 @@
           <a:bodyPr rtlCol="0" anchor="ctr"/>
           <a:lstStyle/>
           <a:p>
-            <a:pPr algn="ctr"/>
+            <a:pPr algn="ctr">
+              <a:defRPr>
+                <a:latin typeface="Roboto"/>
+              </a:defRPr>
+            </a:pPr>
           </a:p>
         </p:txBody>
       </p:sp>
@@ -4083,12 +4153,17 @@
           </a:bodyPr>
           <a:lstStyle/>
           <a:p>
+            <a:pPr>
+              <a:defRPr>
+                <a:latin typeface="Roboto"/>
+              </a:defRPr>
+            </a:pPr>
             <a:r>
               <a:rPr sz="1000" b="0">
                 <a:solidFill>
                   <a:srgbClr val="5F6F63"/>
                 </a:solidFill>
-                <a:latin typeface="Arial"/>
+                <a:latin typeface="Roboto"/>
               </a:rPr>
               <a:t>Sample Community Services Ltd · How many months of runway do we have?</a:t>
             </a:r>
@@ -4117,12 +4192,17 @@
           </a:bodyPr>
           <a:lstStyle/>
           <a:p>
+            <a:pPr>
+              <a:defRPr>
+                <a:latin typeface="Roboto"/>
+              </a:defRPr>
+            </a:pPr>
             <a:r>
               <a:rPr sz="2400" b="1">
                 <a:solidFill>
                   <a:srgbClr val="25342A"/>
                 </a:solidFill>
-                <a:latin typeface="Arial"/>
+                <a:latin typeface="Roboto"/>
               </a:rPr>
               <a:t>Headline numbers</a:t>
             </a:r>
@@ -4170,7 +4250,11 @@
           <a:bodyPr rtlCol="0" anchor="ctr"/>
           <a:lstStyle/>
           <a:p>
-            <a:pPr algn="ctr"/>
+            <a:pPr algn="ctr">
+              <a:defRPr>
+                <a:latin typeface="Roboto"/>
+              </a:defRPr>
+            </a:pPr>
           </a:p>
         </p:txBody>
       </p:sp>
@@ -4196,12 +4280,17 @@
           </a:bodyPr>
           <a:lstStyle/>
           <a:p>
+            <a:pPr>
+              <a:defRPr>
+                <a:latin typeface="Roboto"/>
+              </a:defRPr>
+            </a:pPr>
             <a:r>
               <a:rPr sz="1200" b="0">
                 <a:solidFill>
                   <a:srgbClr val="5F6F63"/>
                 </a:solidFill>
-                <a:latin typeface="Arial"/>
+                <a:latin typeface="Roboto"/>
               </a:rPr>
               <a:t>Runway now</a:t>
             </a:r>
@@ -4230,12 +4319,17 @@
           </a:bodyPr>
           <a:lstStyle/>
           <a:p>
+            <a:pPr>
+              <a:defRPr>
+                <a:latin typeface="Roboto"/>
+              </a:defRPr>
+            </a:pPr>
             <a:r>
               <a:rPr sz="3000" b="1">
                 <a:solidFill>
                   <a:srgbClr val="2F7A5D"/>
                 </a:solidFill>
-                <a:latin typeface="Arial"/>
+                <a:latin typeface="Roboto"/>
               </a:rPr>
               <a:t>2.0 months</a:t>
             </a:r>
@@ -4264,12 +4358,17 @@
           </a:bodyPr>
           <a:lstStyle/>
           <a:p>
+            <a:pPr>
+              <a:defRPr>
+                <a:latin typeface="Roboto"/>
+              </a:defRPr>
+            </a:pPr>
             <a:r>
               <a:rPr sz="1100" b="0">
                 <a:solidFill>
                   <a:srgbClr val="5F6F63"/>
                 </a:solidFill>
-                <a:latin typeface="Arial"/>
+                <a:latin typeface="Roboto"/>
               </a:rPr>
               <a:t>September 2026</a:t>
             </a:r>
@@ -4317,7 +4416,11 @@
           <a:bodyPr rtlCol="0" anchor="ctr"/>
           <a:lstStyle/>
           <a:p>
-            <a:pPr algn="ctr"/>
+            <a:pPr algn="ctr">
+              <a:defRPr>
+                <a:latin typeface="Roboto"/>
+              </a:defRPr>
+            </a:pPr>
           </a:p>
         </p:txBody>
       </p:sp>
@@ -4343,12 +4446,17 @@
           </a:bodyPr>
           <a:lstStyle/>
           <a:p>
+            <a:pPr>
+              <a:defRPr>
+                <a:latin typeface="Roboto"/>
+              </a:defRPr>
+            </a:pPr>
             <a:r>
               <a:rPr sz="1200" b="0">
                 <a:solidFill>
                   <a:srgbClr val="5F6F63"/>
                 </a:solidFill>
-                <a:latin typeface="Arial"/>
+                <a:latin typeface="Roboto"/>
               </a:rPr>
               <a:t>Target</a:t>
             </a:r>
@@ -4377,12 +4485,17 @@
           </a:bodyPr>
           <a:lstStyle/>
           <a:p>
+            <a:pPr>
+              <a:defRPr>
+                <a:latin typeface="Roboto"/>
+              </a:defRPr>
+            </a:pPr>
             <a:r>
               <a:rPr sz="3000" b="1">
                 <a:solidFill>
                   <a:srgbClr val="2F7A5D"/>
                 </a:solidFill>
-                <a:latin typeface="Arial"/>
+                <a:latin typeface="Roboto"/>
               </a:rPr>
               <a:t>3.0 months</a:t>
             </a:r>
@@ -4411,12 +4524,17 @@
           </a:bodyPr>
           <a:lstStyle/>
           <a:p>
+            <a:pPr>
+              <a:defRPr>
+                <a:latin typeface="Roboto"/>
+              </a:defRPr>
+            </a:pPr>
             <a:r>
               <a:rPr sz="1100" b="0">
                 <a:solidFill>
                   <a:srgbClr val="5F6F63"/>
                 </a:solidFill>
-                <a:latin typeface="Arial"/>
+                <a:latin typeface="Roboto"/>
               </a:rPr>
               <a:t>reserves target</a:t>
             </a:r>
@@ -4464,7 +4582,11 @@
           <a:bodyPr rtlCol="0" anchor="ctr"/>
           <a:lstStyle/>
           <a:p>
-            <a:pPr algn="ctr"/>
+            <a:pPr algn="ctr">
+              <a:defRPr>
+                <a:latin typeface="Roboto"/>
+              </a:defRPr>
+            </a:pPr>
           </a:p>
         </p:txBody>
       </p:sp>
@@ -4490,12 +4612,17 @@
           </a:bodyPr>
           <a:lstStyle/>
           <a:p>
+            <a:pPr>
+              <a:defRPr>
+                <a:latin typeface="Roboto"/>
+              </a:defRPr>
+            </a:pPr>
             <a:r>
               <a:rPr sz="1200" b="0">
                 <a:solidFill>
                   <a:srgbClr val="5F6F63"/>
                 </a:solidFill>
-                <a:latin typeface="Arial"/>
+                <a:latin typeface="Roboto"/>
               </a:rPr>
               <a:t>Gap</a:t>
             </a:r>
@@ -4524,12 +4651,17 @@
           </a:bodyPr>
           <a:lstStyle/>
           <a:p>
+            <a:pPr>
+              <a:defRPr>
+                <a:latin typeface="Roboto"/>
+              </a:defRPr>
+            </a:pPr>
             <a:r>
               <a:rPr sz="3000" b="1">
                 <a:solidFill>
                   <a:srgbClr val="2F7A5D"/>
                 </a:solidFill>
-                <a:latin typeface="Arial"/>
+                <a:latin typeface="Roboto"/>
               </a:rPr>
               <a:t>$164,020</a:t>
             </a:r>
@@ -4558,12 +4690,17 @@
           </a:bodyPr>
           <a:lstStyle/>
           <a:p>
+            <a:pPr>
+              <a:defRPr>
+                <a:latin typeface="Roboto"/>
+              </a:defRPr>
+            </a:pPr>
             <a:r>
               <a:rPr sz="1100" b="0">
                 <a:solidFill>
                   <a:srgbClr val="5F6F63"/>
                 </a:solidFill>
-                <a:latin typeface="Arial"/>
+                <a:latin typeface="Roboto"/>
               </a:rPr>
               <a:t>to reach the target</a:t>
             </a:r>
@@ -4611,7 +4748,11 @@
           <a:bodyPr rtlCol="0" anchor="ctr"/>
           <a:lstStyle/>
           <a:p>
-            <a:pPr algn="ctr"/>
+            <a:pPr algn="ctr">
+              <a:defRPr>
+                <a:latin typeface="Roboto"/>
+              </a:defRPr>
+            </a:pPr>
           </a:p>
         </p:txBody>
       </p:sp>
@@ -4637,12 +4778,17 @@
           </a:bodyPr>
           <a:lstStyle/>
           <a:p>
+            <a:pPr>
+              <a:defRPr>
+                <a:latin typeface="Roboto"/>
+              </a:defRPr>
+            </a:pPr>
             <a:r>
               <a:rPr sz="1200" b="0">
                 <a:solidFill>
                   <a:srgbClr val="5F6F63"/>
                 </a:solidFill>
-                <a:latin typeface="Arial"/>
+                <a:latin typeface="Roboto"/>
               </a:rPr>
               <a:t>Runway in August</a:t>
             </a:r>
@@ -4671,12 +4817,17 @@
           </a:bodyPr>
           <a:lstStyle/>
           <a:p>
+            <a:pPr>
+              <a:defRPr>
+                <a:latin typeface="Roboto"/>
+              </a:defRPr>
+            </a:pPr>
             <a:r>
               <a:rPr sz="3000" b="1">
                 <a:solidFill>
                   <a:srgbClr val="2F7A5D"/>
                 </a:solidFill>
-                <a:latin typeface="Arial"/>
+                <a:latin typeface="Roboto"/>
               </a:rPr>
               <a:t>2.2 months</a:t>
             </a:r>
@@ -4705,12 +4856,17 @@
           </a:bodyPr>
           <a:lstStyle/>
           <a:p>
+            <a:pPr>
+              <a:defRPr>
+                <a:latin typeface="Roboto"/>
+              </a:defRPr>
+            </a:pPr>
             <a:r>
               <a:rPr sz="1100" b="0">
                 <a:solidFill>
                   <a:srgbClr val="5F6F63"/>
                 </a:solidFill>
-                <a:latin typeface="Arial"/>
+                <a:latin typeface="Roboto"/>
               </a:rPr>
               <a:t>at August's rate of spending</a:t>
             </a:r>
@@ -4739,12 +4895,17 @@
           </a:bodyPr>
           <a:lstStyle/>
           <a:p>
+            <a:pPr>
+              <a:defRPr>
+                <a:latin typeface="Roboto"/>
+              </a:defRPr>
+            </a:pPr>
             <a:r>
               <a:rPr sz="900" b="0">
                 <a:solidFill>
                   <a:srgbClr val="5F6F63"/>
                 </a:solidFill>
-                <a:latin typeface="Arial"/>
+                <a:latin typeface="Roboto"/>
               </a:rPr>
               <a:t>runway.pptx</a:t>
             </a:r>
@@ -4773,13 +4934,17 @@
           </a:bodyPr>
           <a:lstStyle/>
           <a:p>
-            <a:pPr algn="ctr"/>
+            <a:pPr algn="ctr">
+              <a:defRPr>
+                <a:latin typeface="Roboto"/>
+              </a:defRPr>
+            </a:pPr>
             <a:r>
               <a:rPr sz="900" b="0">
                 <a:solidFill>
                   <a:srgbClr val="5F6F63"/>
                 </a:solidFill>
-                <a:latin typeface="Arial"/>
+                <a:latin typeface="Roboto"/>
               </a:rPr>
               <a:t>Data retrieved 2pm, Tue 6 Oct 2026 · Sample data</a:t>
             </a:r>
@@ -4808,13 +4973,17 @@
           </a:bodyPr>
           <a:lstStyle/>
           <a:p>
-            <a:pPr algn="r"/>
+            <a:pPr algn="r">
+              <a:defRPr>
+                <a:latin typeface="Roboto"/>
+              </a:defRPr>
+            </a:pPr>
             <a:r>
               <a:rPr sz="900" b="0">
                 <a:solidFill>
                   <a:srgbClr val="5F6F63"/>
                 </a:solidFill>
-                <a:latin typeface="Arial"/>
+                <a:latin typeface="Roboto"/>
               </a:rPr>
               <a:t>Slide 2 of 4</a:t>
             </a:r>
@@ -4878,7 +5047,11 @@
           <a:bodyPr rtlCol="0" anchor="ctr"/>
           <a:lstStyle/>
           <a:p>
-            <a:pPr algn="ctr"/>
+            <a:pPr algn="ctr">
+              <a:defRPr>
+                <a:latin typeface="Roboto"/>
+              </a:defRPr>
+            </a:pPr>
           </a:p>
         </p:txBody>
       </p:sp>
@@ -4904,12 +5077,17 @@
           </a:bodyPr>
           <a:lstStyle/>
           <a:p>
+            <a:pPr>
+              <a:defRPr>
+                <a:latin typeface="Roboto"/>
+              </a:defRPr>
+            </a:pPr>
             <a:r>
               <a:rPr sz="1000" b="0">
                 <a:solidFill>
                   <a:srgbClr val="5F6F63"/>
                 </a:solidFill>
-                <a:latin typeface="Arial"/>
+                <a:latin typeface="Roboto"/>
               </a:rPr>
               <a:t>Sample Community Services Ltd · How many months of runway do we have?</a:t>
             </a:r>
@@ -4938,12 +5116,17 @@
           </a:bodyPr>
           <a:lstStyle/>
           <a:p>
+            <a:pPr>
+              <a:defRPr>
+                <a:latin typeface="Roboto"/>
+              </a:defRPr>
+            </a:pPr>
             <a:r>
               <a:rPr sz="2400" b="1">
                 <a:solidFill>
                   <a:srgbClr val="25342A"/>
                 </a:solidFill>
-                <a:latin typeface="Arial"/>
+                <a:latin typeface="Roboto"/>
               </a:rPr>
               <a:t>What it shows</a:t>
             </a:r>
@@ -4991,7 +5174,11 @@
           <a:bodyPr rtlCol="0" anchor="ctr"/>
           <a:lstStyle/>
           <a:p>
-            <a:pPr algn="ctr"/>
+            <a:pPr algn="ctr">
+              <a:defRPr>
+                <a:latin typeface="Roboto"/>
+              </a:defRPr>
+            </a:pPr>
           </a:p>
         </p:txBody>
       </p:sp>
@@ -5017,12 +5204,17 @@
           </a:bodyPr>
           <a:lstStyle/>
           <a:p>
+            <a:pPr>
+              <a:defRPr>
+                <a:latin typeface="Roboto"/>
+              </a:defRPr>
+            </a:pPr>
             <a:r>
               <a:rPr sz="1100" b="1">
                 <a:solidFill>
                   <a:srgbClr val="5F6F63"/>
                 </a:solidFill>
-                <a:latin typeface="Arial"/>
+                <a:latin typeface="Roboto"/>
               </a:rPr>
               <a:t>WHAT IT SHOWS</a:t>
             </a:r>
@@ -5051,12 +5243,17 @@
           </a:bodyPr>
           <a:lstStyle/>
           <a:p>
+            <a:pPr>
+              <a:defRPr>
+                <a:latin typeface="Roboto"/>
+              </a:defRPr>
+            </a:pPr>
             <a:r>
               <a:rPr sz="1600" b="0">
                 <a:solidFill>
                   <a:srgbClr val="25342A"/>
                 </a:solidFill>
-                <a:latin typeface="Arial"/>
+                <a:latin typeface="Roboto"/>
               </a:rPr>
               <a:t>Unrestricted cash ($324,680, after setting aside unspent grant money) would cover 2.0 months of spending at September's rate of spending, short of the 3.0 months target by $164,020.</a:t>
             </a:r>
@@ -5104,7 +5301,11 @@
           <a:bodyPr rtlCol="0" anchor="ctr"/>
           <a:lstStyle/>
           <a:p>
-            <a:pPr algn="ctr"/>
+            <a:pPr algn="ctr">
+              <a:defRPr>
+                <a:latin typeface="Roboto"/>
+              </a:defRPr>
+            </a:pPr>
           </a:p>
         </p:txBody>
       </p:sp>
@@ -5130,12 +5331,17 @@
           </a:bodyPr>
           <a:lstStyle/>
           <a:p>
+            <a:pPr>
+              <a:defRPr>
+                <a:latin typeface="Roboto"/>
+              </a:defRPr>
+            </a:pPr>
             <a:r>
               <a:rPr sz="1100" b="1">
                 <a:solidFill>
                   <a:srgbClr val="5F6F63"/>
                 </a:solidFill>
-                <a:latin typeface="Arial"/>
+                <a:latin typeface="Roboto"/>
               </a:rPr>
               <a:t>WHAT YOU'D DO ABOUT IT</a:t>
             </a:r>
@@ -5164,12 +5370,17 @@
           </a:bodyPr>
           <a:lstStyle/>
           <a:p>
+            <a:pPr>
+              <a:defRPr>
+                <a:latin typeface="Roboto"/>
+              </a:defRPr>
+            </a:pPr>
             <a:r>
               <a:rPr sz="1600" b="0">
                 <a:solidFill>
                   <a:srgbClr val="25342A"/>
                 </a:solidFill>
-                <a:latin typeface="Arial"/>
+                <a:latin typeface="Roboto"/>
               </a:rPr>
               <a:t>A reserves plan is the usual next step: how much of each month's surplus goes to reserves, and by when the gap is closed.</a:t>
             </a:r>
@@ -5198,12 +5409,17 @@
           </a:bodyPr>
           <a:lstStyle/>
           <a:p>
+            <a:pPr>
+              <a:defRPr>
+                <a:latin typeface="Roboto"/>
+              </a:defRPr>
+            </a:pPr>
             <a:r>
               <a:rPr sz="900" b="0">
                 <a:solidFill>
                   <a:srgbClr val="5F6F63"/>
                 </a:solidFill>
-                <a:latin typeface="Arial"/>
+                <a:latin typeface="Roboto"/>
               </a:rPr>
               <a:t>runway.pptx</a:t>
             </a:r>
@@ -5232,13 +5448,17 @@
           </a:bodyPr>
           <a:lstStyle/>
           <a:p>
-            <a:pPr algn="ctr"/>
+            <a:pPr algn="ctr">
+              <a:defRPr>
+                <a:latin typeface="Roboto"/>
+              </a:defRPr>
+            </a:pPr>
             <a:r>
               <a:rPr sz="900" b="0">
                 <a:solidFill>
                   <a:srgbClr val="5F6F63"/>
                 </a:solidFill>
-                <a:latin typeface="Arial"/>
+                <a:latin typeface="Roboto"/>
               </a:rPr>
               <a:t>Data retrieved 2pm, Tue 6 Oct 2026 · Sample data</a:t>
             </a:r>
@@ -5267,13 +5487,17 @@
           </a:bodyPr>
           <a:lstStyle/>
           <a:p>
-            <a:pPr algn="r"/>
+            <a:pPr algn="r">
+              <a:defRPr>
+                <a:latin typeface="Roboto"/>
+              </a:defRPr>
+            </a:pPr>
             <a:r>
               <a:rPr sz="900" b="0">
                 <a:solidFill>
                   <a:srgbClr val="5F6F63"/>
                 </a:solidFill>
-                <a:latin typeface="Arial"/>
+                <a:latin typeface="Roboto"/>
               </a:rPr>
               <a:t>Slide 3 of 4</a:t>
             </a:r>
@@ -5337,7 +5561,11 @@
           <a:bodyPr rtlCol="0" anchor="ctr"/>
           <a:lstStyle/>
           <a:p>
-            <a:pPr algn="ctr"/>
+            <a:pPr algn="ctr">
+              <a:defRPr>
+                <a:latin typeface="Roboto"/>
+              </a:defRPr>
+            </a:pPr>
           </a:p>
         </p:txBody>
       </p:sp>
@@ -5363,12 +5591,17 @@
           </a:bodyPr>
           <a:lstStyle/>
           <a:p>
+            <a:pPr>
+              <a:defRPr>
+                <a:latin typeface="Roboto"/>
+              </a:defRPr>
+            </a:pPr>
             <a:r>
               <a:rPr sz="1000" b="0">
                 <a:solidFill>
                   <a:srgbClr val="5F6F63"/>
                 </a:solidFill>
-                <a:latin typeface="Arial"/>
+                <a:latin typeface="Roboto"/>
               </a:rPr>
               <a:t>Sample Community Services Ltd · How many months of runway do we have?</a:t>
             </a:r>
@@ -5397,12 +5630,17 @@
           </a:bodyPr>
           <a:lstStyle/>
           <a:p>
+            <a:pPr>
+              <a:defRPr>
+                <a:latin typeface="Roboto"/>
+              </a:defRPr>
+            </a:pPr>
             <a:r>
               <a:rPr sz="2400" b="1">
                 <a:solidFill>
                   <a:srgbClr val="25342A"/>
                 </a:solidFill>
-                <a:latin typeface="Arial"/>
+                <a:latin typeface="Roboto"/>
               </a:rPr>
               <a:t>Cash at bank, every day (1 Aug to 30 Sep) · Cash at bank $</a:t>
             </a:r>
@@ -5431,12 +5669,17 @@
           </a:bodyPr>
           <a:lstStyle/>
           <a:p>
+            <a:pPr>
+              <a:defRPr>
+                <a:latin typeface="Roboto"/>
+              </a:defRPr>
+            </a:pPr>
             <a:r>
               <a:rPr sz="1200" b="0">
                 <a:solidFill>
                   <a:srgbClr val="5F6F63"/>
                 </a:solidFill>
-                <a:latin typeface="Arial"/>
+                <a:latin typeface="Roboto"/>
               </a:rPr>
               <a:t>Cash at bank includes unspent grant money. The daily cash data starts 1 August 2026 (after the opening balance).</a:t>
             </a:r>
@@ -5483,12 +5726,17 @@
           </a:bodyPr>
           <a:lstStyle/>
           <a:p>
+            <a:pPr>
+              <a:defRPr>
+                <a:latin typeface="Roboto"/>
+              </a:defRPr>
+            </a:pPr>
             <a:r>
               <a:rPr sz="900" b="0">
                 <a:solidFill>
                   <a:srgbClr val="5F6F63"/>
                 </a:solidFill>
-                <a:latin typeface="Arial"/>
+                <a:latin typeface="Roboto"/>
               </a:rPr>
               <a:t>runway.pptx</a:t>
             </a:r>
@@ -5517,13 +5765,17 @@
           </a:bodyPr>
           <a:lstStyle/>
           <a:p>
-            <a:pPr algn="ctr"/>
+            <a:pPr algn="ctr">
+              <a:defRPr>
+                <a:latin typeface="Roboto"/>
+              </a:defRPr>
+            </a:pPr>
             <a:r>
               <a:rPr sz="900" b="0">
                 <a:solidFill>
                   <a:srgbClr val="5F6F63"/>
                 </a:solidFill>
-                <a:latin typeface="Arial"/>
+                <a:latin typeface="Roboto"/>
               </a:rPr>
               <a:t>Data retrieved 2pm, Tue 6 Oct 2026 · Sample data</a:t>
             </a:r>
@@ -5552,13 +5804,17 @@
           </a:bodyPr>
           <a:lstStyle/>
           <a:p>
-            <a:pPr algn="r"/>
+            <a:pPr algn="r">
+              <a:defRPr>
+                <a:latin typeface="Roboto"/>
+              </a:defRPr>
+            </a:pPr>
             <a:r>
               <a:rPr sz="900" b="0">
                 <a:solidFill>
                   <a:srgbClr val="5F6F63"/>
                 </a:solidFill>
-                <a:latin typeface="Arial"/>
+                <a:latin typeface="Roboto"/>
               </a:rPr>
               <a:t>Slide 4 of 4</a:t>
             </a:r>

--- a/media/exports/reports/2026-09/runway.pptx
+++ b/media/exports/reports/2026-09/runway.pptx
@@ -4370,7 +4370,7 @@
                 </a:solidFill>
                 <a:latin typeface="Roboto"/>
               </a:rPr>
-              <a:t>September 2026</a:t>
+              <a:t>target 3.0 months</a:t>
             </a:r>
           </a:p>
         </p:txBody>

--- a/media/exports/reports/2026-09/runway.pptx
+++ b/media/exports/reports/2026-09/runway.pptx
@@ -6,9 +6,7 @@
   </p:sldMasterIdLst>
   <p:sldIdLst>
     <p:sldId id="256" r:id="rId7"/>
-    <p:sldId id="257" r:id="rId8"/>
-    <p:sldId id="258" r:id="rId9"/>
-    <p:sldId id="259" r:id="rId10"/>
+    <p:sldId id="257" r:id="rId9"/>
   </p:sldIdLst>
   <p:sldSz cx="12191695" cy="6858000" type="screen4x3"/>
   <p:notesSz cx="6858000" cy="9144000"/>
@@ -115,9 +113,19 @@
   <c:date1904 val="0"/>
   <c:roundedCorners val="0"/>
   <c:chart>
-    <c:autoTitleDeleted val="0"/>
+    <c:autoTitleDeleted val="1"/>
     <c:plotArea>
-      <c:layout/>
+      <c:layout>
+        <c:manualLayout>
+          <c:layoutTarget val="inner"/>
+          <c:xMode val="edge"/>
+          <c:yMode val="edge"/>
+          <c:x val="0.11"/>
+          <c:y val="0.05"/>
+          <c:w val="0.86"/>
+          <c:h val="0.8"/>
+        </c:manualLayout>
+      </c:layout>
       <c:areaChart>
         <c:grouping val="standard"/>
         <c:varyColors val="0"/>
@@ -130,7 +138,7 @@
               <c:strCache>
                 <c:ptCount val="1"/>
                 <c:pt idx="0">
-                  <c:v>Value</c:v>
+                  <c:v>Cash at bank $</c:v>
                 </c:pt>
               </c:strCache>
             </c:strRef>
@@ -567,12 +575,15 @@
         <c:auto val="1"/>
         <c:lblAlgn val="ctr"/>
         <c:lblOffset val="100"/>
+        <c:tickLblSkip val="7"/>
         <c:noMultiLvlLbl val="0"/>
       </c:catAx>
       <c:valAx>
         <c:axId val="-2100718248"/>
         <c:scaling>
           <c:orientation val="minMax"/>
+          <c:max val="800000.0"/>
+          <c:min val="0.0"/>
         </c:scaling>
         <c:delete val="0"/>
         <c:axPos val="l"/>
@@ -606,6 +617,7 @@
         <c:crossAx val="-2101159928"/>
         <c:crosses val="autoZero"/>
         <c:crossBetween val="midCat"/>
+        <c:majorUnit val="200000.0"/>
       </c:valAx>
     </c:plotArea>
     <c:plotVisOnly val="1"/>
@@ -628,6 +640,496 @@
     <c:autoUpdate val="0"/>
   </c:externalData>
 </c:chartSpace>
+</file>
+
+<file path=ppt/notesMasters/notesMaster1.xml><?xml version="1.0" encoding="utf-8"?>
+<p:notesMaster xmlns:a="http://schemas.openxmlformats.org/drawingml/2006/main" xmlns:p="http://schemas.openxmlformats.org/presentationml/2006/main" xmlns:r="http://schemas.openxmlformats.org/officeDocument/2006/relationships">
+  <p:cSld>
+    <p:bg>
+      <p:bgRef idx="1001">
+        <a:schemeClr val="bg1"/>
+      </p:bgRef>
+    </p:bg>
+    <p:spTree>
+      <p:nvGrpSpPr>
+        <p:cNvPr id="1" name=""/>
+        <p:cNvGrpSpPr/>
+        <p:nvPr/>
+      </p:nvGrpSpPr>
+      <p:grpSpPr>
+        <a:xfrm>
+          <a:off x="0" y="0"/>
+          <a:ext cx="0" cy="0"/>
+          <a:chOff x="0" y="0"/>
+          <a:chExt cx="0" cy="0"/>
+        </a:xfrm>
+      </p:grpSpPr>
+      <p:sp>
+        <p:nvSpPr>
+          <p:cNvPr id="2" name="Header Placeholder 1"/>
+          <p:cNvSpPr>
+            <a:spLocks noGrp="1"/>
+          </p:cNvSpPr>
+          <p:nvPr>
+            <p:ph type="hdr" sz="quarter"/>
+          </p:nvPr>
+        </p:nvSpPr>
+        <p:spPr>
+          <a:xfrm>
+            <a:off x="0" y="0"/>
+            <a:ext cx="2971800" cy="457200"/>
+          </a:xfrm>
+          <a:prstGeom prst="rect">
+            <a:avLst/>
+          </a:prstGeom>
+        </p:spPr>
+        <p:txBody>
+          <a:bodyPr vert="horz" lIns="91440" tIns="45720" rIns="91440" bIns="45720" rtlCol="0"/>
+          <a:lstStyle>
+            <a:lvl1pPr algn="l">
+              <a:defRPr sz="1200"/>
+            </a:lvl1pPr>
+          </a:lstStyle>
+          <a:p>
+            <a:endParaRPr lang="en-US"/>
+          </a:p>
+        </p:txBody>
+      </p:sp>
+      <p:sp>
+        <p:nvSpPr>
+          <p:cNvPr id="3" name="Date Placeholder 2"/>
+          <p:cNvSpPr>
+            <a:spLocks noGrp="1"/>
+          </p:cNvSpPr>
+          <p:nvPr>
+            <p:ph type="dt" idx="1"/>
+          </p:nvPr>
+        </p:nvSpPr>
+        <p:spPr>
+          <a:xfrm>
+            <a:off x="3884613" y="0"/>
+            <a:ext cx="2971800" cy="457200"/>
+          </a:xfrm>
+          <a:prstGeom prst="rect">
+            <a:avLst/>
+          </a:prstGeom>
+        </p:spPr>
+        <p:txBody>
+          <a:bodyPr vert="horz" lIns="91440" tIns="45720" rIns="91440" bIns="45720" rtlCol="0"/>
+          <a:lstStyle>
+            <a:lvl1pPr algn="r">
+              <a:defRPr sz="1200"/>
+            </a:lvl1pPr>
+          </a:lstStyle>
+          <a:p>
+            <a:fld id="{0F89C1C7-3DCD-1040-A9CF-14679D8B5DDD}" type="datetimeFigureOut">
+              <a:rPr lang="en-US" smtClean="0"/>
+              <a:t>10/17/16</a:t>
+            </a:fld>
+            <a:endParaRPr lang="en-US"/>
+          </a:p>
+        </p:txBody>
+      </p:sp>
+      <p:sp>
+        <p:nvSpPr>
+          <p:cNvPr id="4" name="Slide Image Placeholder 3"/>
+          <p:cNvSpPr>
+            <a:spLocks noGrp="1" noRot="1" noChangeAspect="1"/>
+          </p:cNvSpPr>
+          <p:nvPr>
+            <p:ph type="sldImg" idx="2"/>
+          </p:nvPr>
+        </p:nvSpPr>
+        <p:spPr>
+          <a:xfrm>
+            <a:off x="1143000" y="685800"/>
+            <a:ext cx="4572000" cy="3429000"/>
+          </a:xfrm>
+          <a:prstGeom prst="rect">
+            <a:avLst/>
+          </a:prstGeom>
+          <a:noFill/>
+          <a:ln w="12700">
+            <a:solidFill>
+              <a:prstClr val="black"/>
+            </a:solidFill>
+          </a:ln>
+        </p:spPr>
+        <p:txBody>
+          <a:bodyPr vert="horz" lIns="91440" tIns="45720" rIns="91440" bIns="45720" rtlCol="0" anchor="ctr"/>
+          <a:lstStyle/>
+          <a:p>
+            <a:endParaRPr lang="en-US"/>
+          </a:p>
+        </p:txBody>
+      </p:sp>
+      <p:sp>
+        <p:nvSpPr>
+          <p:cNvPr id="5" name="Notes Placeholder 4"/>
+          <p:cNvSpPr>
+            <a:spLocks noGrp="1"/>
+          </p:cNvSpPr>
+          <p:nvPr>
+            <p:ph type="body" sz="quarter" idx="3"/>
+          </p:nvPr>
+        </p:nvSpPr>
+        <p:spPr>
+          <a:xfrm>
+            <a:off x="685800" y="4343400"/>
+            <a:ext cx="5486400" cy="4114800"/>
+          </a:xfrm>
+          <a:prstGeom prst="rect">
+            <a:avLst/>
+          </a:prstGeom>
+        </p:spPr>
+        <p:txBody>
+          <a:bodyPr vert="horz" lIns="91440" tIns="45720" rIns="91440" bIns="45720" rtlCol="0"/>
+          <a:lstStyle/>
+          <a:p>
+            <a:pPr lvl="0"/>
+            <a:r>
+              <a:rPr lang="en-US" smtClean="0"/>
+              <a:t>Click to edit Master text styles</a:t>
+            </a:r>
+          </a:p>
+          <a:p>
+            <a:pPr lvl="1"/>
+            <a:r>
+              <a:rPr lang="en-US" smtClean="0"/>
+              <a:t>Second level</a:t>
+            </a:r>
+          </a:p>
+          <a:p>
+            <a:pPr lvl="2"/>
+            <a:r>
+              <a:rPr lang="en-US" smtClean="0"/>
+              <a:t>Third level</a:t>
+            </a:r>
+          </a:p>
+          <a:p>
+            <a:pPr lvl="3"/>
+            <a:r>
+              <a:rPr lang="en-US" smtClean="0"/>
+              <a:t>Fourth level</a:t>
+            </a:r>
+          </a:p>
+          <a:p>
+            <a:pPr lvl="4"/>
+            <a:r>
+              <a:rPr lang="en-US" smtClean="0"/>
+              <a:t>Fifth level</a:t>
+            </a:r>
+            <a:endParaRPr lang="en-US"/>
+          </a:p>
+        </p:txBody>
+      </p:sp>
+      <p:sp>
+        <p:nvSpPr>
+          <p:cNvPr id="6" name="Footer Placeholder 5"/>
+          <p:cNvSpPr>
+            <a:spLocks noGrp="1"/>
+          </p:cNvSpPr>
+          <p:nvPr>
+            <p:ph type="ftr" sz="quarter" idx="4"/>
+          </p:nvPr>
+        </p:nvSpPr>
+        <p:spPr>
+          <a:xfrm>
+            <a:off x="0" y="8685213"/>
+            <a:ext cx="2971800" cy="457200"/>
+          </a:xfrm>
+          <a:prstGeom prst="rect">
+            <a:avLst/>
+          </a:prstGeom>
+        </p:spPr>
+        <p:txBody>
+          <a:bodyPr vert="horz" lIns="91440" tIns="45720" rIns="91440" bIns="45720" rtlCol="0" anchor="b"/>
+          <a:lstStyle>
+            <a:lvl1pPr algn="l">
+              <a:defRPr sz="1200"/>
+            </a:lvl1pPr>
+          </a:lstStyle>
+          <a:p>
+            <a:endParaRPr lang="en-US"/>
+          </a:p>
+        </p:txBody>
+      </p:sp>
+      <p:sp>
+        <p:nvSpPr>
+          <p:cNvPr id="7" name="Slide Number Placeholder 6"/>
+          <p:cNvSpPr>
+            <a:spLocks noGrp="1"/>
+          </p:cNvSpPr>
+          <p:nvPr>
+            <p:ph type="sldNum" sz="quarter" idx="5"/>
+          </p:nvPr>
+        </p:nvSpPr>
+        <p:spPr>
+          <a:xfrm>
+            <a:off x="3884613" y="8685213"/>
+            <a:ext cx="2971800" cy="457200"/>
+          </a:xfrm>
+          <a:prstGeom prst="rect">
+            <a:avLst/>
+          </a:prstGeom>
+        </p:spPr>
+        <p:txBody>
+          <a:bodyPr vert="horz" lIns="91440" tIns="45720" rIns="91440" bIns="45720" rtlCol="0" anchor="b"/>
+          <a:lstStyle>
+            <a:lvl1pPr algn="r">
+              <a:defRPr sz="1200"/>
+            </a:lvl1pPr>
+          </a:lstStyle>
+          <a:p>
+            <a:fld id="{BB5E49A5-4136-284D-997B-48E1D791AD67}" type="slidenum">
+              <a:rPr lang="en-US" smtClean="0"/>
+              <a:t>‹#›</a:t>
+            </a:fld>
+            <a:endParaRPr lang="en-US"/>
+          </a:p>
+        </p:txBody>
+      </p:sp>
+    </p:spTree>
+    <p:extLst>
+      <p:ext uri="{BB962C8B-B14F-4D97-AF65-F5344CB8AC3E}">
+        <p14:creationId xmlns:p14="http://schemas.microsoft.com/office/powerpoint/2010/main" val="2623252185"/>
+      </p:ext>
+    </p:extLst>
+  </p:cSld>
+  <p:clrMap bg1="lt1" tx1="dk1" bg2="lt2" tx2="dk2" accent1="accent1" accent2="accent2" accent3="accent3" accent4="accent4" accent5="accent5" accent6="accent6" hlink="hlink" folHlink="folHlink"/>
+  <p:notesStyle>
+    <a:lvl1pPr marL="0" algn="l" defTabSz="457200" rtl="0" eaLnBrk="1" latinLnBrk="0" hangingPunct="1">
+      <a:defRPr sz="1200" kern="1200">
+        <a:solidFill>
+          <a:schemeClr val="tx1"/>
+        </a:solidFill>
+        <a:latin typeface="+mn-lt"/>
+        <a:ea typeface="+mn-ea"/>
+        <a:cs typeface="+mn-cs"/>
+      </a:defRPr>
+    </a:lvl1pPr>
+    <a:lvl2pPr marL="457200" algn="l" defTabSz="457200" rtl="0" eaLnBrk="1" latinLnBrk="0" hangingPunct="1">
+      <a:defRPr sz="1200" kern="1200">
+        <a:solidFill>
+          <a:schemeClr val="tx1"/>
+        </a:solidFill>
+        <a:latin typeface="+mn-lt"/>
+        <a:ea typeface="+mn-ea"/>
+        <a:cs typeface="+mn-cs"/>
+      </a:defRPr>
+    </a:lvl2pPr>
+    <a:lvl3pPr marL="914400" algn="l" defTabSz="457200" rtl="0" eaLnBrk="1" latinLnBrk="0" hangingPunct="1">
+      <a:defRPr sz="1200" kern="1200">
+        <a:solidFill>
+          <a:schemeClr val="tx1"/>
+        </a:solidFill>
+        <a:latin typeface="+mn-lt"/>
+        <a:ea typeface="+mn-ea"/>
+        <a:cs typeface="+mn-cs"/>
+      </a:defRPr>
+    </a:lvl3pPr>
+    <a:lvl4pPr marL="1371600" algn="l" defTabSz="457200" rtl="0" eaLnBrk="1" latinLnBrk="0" hangingPunct="1">
+      <a:defRPr sz="1200" kern="1200">
+        <a:solidFill>
+          <a:schemeClr val="tx1"/>
+        </a:solidFill>
+        <a:latin typeface="+mn-lt"/>
+        <a:ea typeface="+mn-ea"/>
+        <a:cs typeface="+mn-cs"/>
+      </a:defRPr>
+    </a:lvl4pPr>
+    <a:lvl5pPr marL="1828800" algn="l" defTabSz="457200" rtl="0" eaLnBrk="1" latinLnBrk="0" hangingPunct="1">
+      <a:defRPr sz="1200" kern="1200">
+        <a:solidFill>
+          <a:schemeClr val="tx1"/>
+        </a:solidFill>
+        <a:latin typeface="+mn-lt"/>
+        <a:ea typeface="+mn-ea"/>
+        <a:cs typeface="+mn-cs"/>
+      </a:defRPr>
+    </a:lvl5pPr>
+    <a:lvl6pPr marL="2286000" algn="l" defTabSz="457200" rtl="0" eaLnBrk="1" latinLnBrk="0" hangingPunct="1">
+      <a:defRPr sz="1200" kern="1200">
+        <a:solidFill>
+          <a:schemeClr val="tx1"/>
+        </a:solidFill>
+        <a:latin typeface="+mn-lt"/>
+        <a:ea typeface="+mn-ea"/>
+        <a:cs typeface="+mn-cs"/>
+      </a:defRPr>
+    </a:lvl6pPr>
+    <a:lvl7pPr marL="2743200" algn="l" defTabSz="457200" rtl="0" eaLnBrk="1" latinLnBrk="0" hangingPunct="1">
+      <a:defRPr sz="1200" kern="1200">
+        <a:solidFill>
+          <a:schemeClr val="tx1"/>
+        </a:solidFill>
+        <a:latin typeface="+mn-lt"/>
+        <a:ea typeface="+mn-ea"/>
+        <a:cs typeface="+mn-cs"/>
+      </a:defRPr>
+    </a:lvl7pPr>
+    <a:lvl8pPr marL="3200400" algn="l" defTabSz="457200" rtl="0" eaLnBrk="1" latinLnBrk="0" hangingPunct="1">
+      <a:defRPr sz="1200" kern="1200">
+        <a:solidFill>
+          <a:schemeClr val="tx1"/>
+        </a:solidFill>
+        <a:latin typeface="+mn-lt"/>
+        <a:ea typeface="+mn-ea"/>
+        <a:cs typeface="+mn-cs"/>
+      </a:defRPr>
+    </a:lvl8pPr>
+    <a:lvl9pPr marL="3657600" algn="l" defTabSz="457200" rtl="0" eaLnBrk="1" latinLnBrk="0" hangingPunct="1">
+      <a:defRPr sz="1200" kern="1200">
+        <a:solidFill>
+          <a:schemeClr val="tx1"/>
+        </a:solidFill>
+        <a:latin typeface="+mn-lt"/>
+        <a:ea typeface="+mn-ea"/>
+        <a:cs typeface="+mn-cs"/>
+      </a:defRPr>
+    </a:lvl9pPr>
+  </p:notesStyle>
+</p:notesMaster>
+</file>
+
+<file path=ppt/notesSlides/notesSlide1.xml><?xml version="1.0" encoding="utf-8"?>
+<p:notes xmlns:a="http://schemas.openxmlformats.org/drawingml/2006/main" xmlns:p="http://schemas.openxmlformats.org/presentationml/2006/main" xmlns:r="http://schemas.openxmlformats.org/officeDocument/2006/relationships">
+  <p:cSld>
+    <p:spTree>
+      <p:nvGrpSpPr>
+        <p:cNvPr id="1" name=""/>
+        <p:cNvGrpSpPr/>
+        <p:nvPr/>
+      </p:nvGrpSpPr>
+      <p:grpSpPr>
+        <a:xfrm>
+          <a:off x="0" y="0"/>
+          <a:ext cx="0" cy="0"/>
+          <a:chOff x="0" y="0"/>
+          <a:chExt cx="0" cy="0"/>
+        </a:xfrm>
+      </p:grpSpPr>
+      <p:sp>
+        <p:nvSpPr>
+          <p:cNvPr id="2" name="Slide Image Placeholder 1"/>
+          <p:cNvSpPr>
+            <a:spLocks noGrp="1"/>
+          </p:cNvSpPr>
+          <p:nvPr>
+            <p:ph type="sldImg" idx="2"/>
+          </p:nvPr>
+        </p:nvSpPr>
+        <p:spPr/>
+      </p:sp>
+      <p:sp>
+        <p:nvSpPr>
+          <p:cNvPr id="3" name="Notes Placeholder 2"/>
+          <p:cNvSpPr>
+            <a:spLocks noGrp="1"/>
+          </p:cNvSpPr>
+          <p:nvPr>
+            <p:ph type="body" idx="3" sz="quarter"/>
+          </p:nvPr>
+        </p:nvSpPr>
+        <p:spPr/>
+        <p:txBody>
+          <a:bodyPr/>
+          <a:lstStyle/>
+          <a:p>
+            <a:r>
+              <a:t>How many months of runway do we have?. Sample Community Services Ltd. Period: September 2026. How long the organisation could keep going on its own money: cash at bank, less unspent grant money (which belongs to the funders' programs), divided by a month's spending.</a:t>
+            </a:r>
+          </a:p>
+        </p:txBody>
+      </p:sp>
+      <p:sp>
+        <p:nvSpPr>
+          <p:cNvPr id="4" name="Slide Number Placeholder 3"/>
+          <p:cNvSpPr>
+            <a:spLocks noGrp="1"/>
+          </p:cNvSpPr>
+          <p:nvPr>
+            <p:ph type="sldNum" idx="5" sz="quarter"/>
+          </p:nvPr>
+        </p:nvSpPr>
+        <p:spPr/>
+      </p:sp>
+    </p:spTree>
+  </p:cSld>
+  <p:clrMapOvr>
+    <a:masterClrMapping/>
+  </p:clrMapOvr>
+</p:notes>
+</file>
+
+<file path=ppt/notesSlides/notesSlide2.xml><?xml version="1.0" encoding="utf-8"?>
+<p:notes xmlns:a="http://schemas.openxmlformats.org/drawingml/2006/main" xmlns:p="http://schemas.openxmlformats.org/presentationml/2006/main" xmlns:r="http://schemas.openxmlformats.org/officeDocument/2006/relationships">
+  <p:cSld>
+    <p:spTree>
+      <p:nvGrpSpPr>
+        <p:cNvPr id="1" name=""/>
+        <p:cNvGrpSpPr/>
+        <p:nvPr/>
+      </p:nvGrpSpPr>
+      <p:grpSpPr>
+        <a:xfrm>
+          <a:off x="0" y="0"/>
+          <a:ext cx="0" cy="0"/>
+          <a:chOff x="0" y="0"/>
+          <a:chExt cx="0" cy="0"/>
+        </a:xfrm>
+      </p:grpSpPr>
+      <p:sp>
+        <p:nvSpPr>
+          <p:cNvPr id="2" name="Slide Image Placeholder 1"/>
+          <p:cNvSpPr>
+            <a:spLocks noGrp="1"/>
+          </p:cNvSpPr>
+          <p:nvPr>
+            <p:ph type="sldImg" idx="2"/>
+          </p:nvPr>
+        </p:nvSpPr>
+        <p:spPr/>
+      </p:sp>
+      <p:sp>
+        <p:nvSpPr>
+          <p:cNvPr id="3" name="Notes Placeholder 2"/>
+          <p:cNvSpPr>
+            <a:spLocks noGrp="1"/>
+          </p:cNvSpPr>
+          <p:nvPr>
+            <p:ph type="body" idx="3" sz="quarter"/>
+          </p:nvPr>
+        </p:nvSpPr>
+        <p:spPr/>
+        <p:txBody>
+          <a:bodyPr/>
+          <a:lstStyle/>
+          <a:p>
+            <a:r>
+              <a:t>How many months of runway do we have?. Runway now: 2.0 months; Target: 3.0 months; Gap: $164,020; Runway in August: 2.2 months. Unrestricted cash ($324,680, after setting aside unspent grant money) would cover 2.0 months of spending at September's rate of spending, short of the 3.0 months target by $164,020. A reserves plan is the usual next step: how much of each month's surplus goes to reserves, and by when the gap is closed.</a:t>
+            </a:r>
+          </a:p>
+        </p:txBody>
+      </p:sp>
+      <p:sp>
+        <p:nvSpPr>
+          <p:cNvPr id="4" name="Slide Number Placeholder 3"/>
+          <p:cNvSpPr>
+            <a:spLocks noGrp="1"/>
+          </p:cNvSpPr>
+          <p:nvPr>
+            <p:ph type="sldNum" idx="5" sz="quarter"/>
+          </p:nvPr>
+        </p:nvSpPr>
+        <p:spPr/>
+      </p:sp>
+    </p:spTree>
+  </p:cSld>
+  <p:clrMapOvr>
+    <a:masterClrMapping/>
+  </p:clrMapOvr>
+</p:notes>
 </file>
 
 <file path=ppt/slideLayouts/slideLayout1.xml><?xml version="1.0" encoding="utf-8"?>
@@ -3613,7 +4115,44 @@
       <p:grpSpPr/>
       <p:sp>
         <p:nvSpPr>
-          <p:cNvPr id="2" name="Rectangle 1"/>
+          <p:cNvPr id="2" name="Title 1"/>
+          <p:cNvSpPr>
+            <a:spLocks noGrp="1"/>
+          </p:cNvSpPr>
+          <p:nvPr>
+            <p:ph type="ctrTitle"/>
+          </p:nvPr>
+        </p:nvSpPr>
+        <p:spPr>
+          <a:xfrm>
+            <a:off x="457200" y="1965960"/>
+            <a:ext cx="11277295" cy="1097280"/>
+          </a:xfrm>
+        </p:spPr>
+        <p:txBody>
+          <a:bodyPr wrap="square"/>
+          <a:lstStyle/>
+          <a:p>
+            <a:pPr algn="l">
+              <a:defRPr>
+                <a:latin typeface="Roboto"/>
+              </a:defRPr>
+            </a:pPr>
+            <a:r>
+              <a:rPr sz="3400" b="1">
+                <a:solidFill>
+                  <a:srgbClr val="25342A"/>
+                </a:solidFill>
+                <a:latin typeface="Roboto"/>
+              </a:rPr>
+              <a:t>How many months of runway do we have?</a:t>
+            </a:r>
+          </a:p>
+        </p:txBody>
+      </p:sp>
+      <p:sp>
+        <p:nvSpPr>
+          <p:cNvPr id="3" name="Rectangle 2"/>
           <p:cNvSpPr/>
           <p:nvPr/>
         </p:nvSpPr>
@@ -3669,7 +4208,7 @@
       </p:sp>
       <p:sp>
         <p:nvSpPr>
-          <p:cNvPr id="3" name="TextBox 2"/>
+          <p:cNvPr id="4" name="TextBox 3"/>
           <p:cNvSpPr txBox="1"/>
           <p:nvPr/>
         </p:nvSpPr>
@@ -3684,7 +4223,7 @@
           <a:noFill/>
         </p:spPr>
         <p:txBody>
-          <a:bodyPr wrap="square">
+          <a:bodyPr wrap="square" lIns="45720" rIns="45720">
             <a:spAutoFit/>
           </a:bodyPr>
           <a:lstStyle/>
@@ -3708,7 +4247,7 @@
       </p:sp>
       <p:sp>
         <p:nvSpPr>
-          <p:cNvPr id="4" name="TextBox 3"/>
+          <p:cNvPr id="5" name="TextBox 4"/>
           <p:cNvSpPr txBox="1"/>
           <p:nvPr/>
         </p:nvSpPr>
@@ -3723,7 +4262,7 @@
           <a:noFill/>
         </p:spPr>
         <p:txBody>
-          <a:bodyPr wrap="square">
+          <a:bodyPr wrap="square" lIns="45720" rIns="45720">
             <a:spAutoFit/>
           </a:bodyPr>
           <a:lstStyle/>
@@ -3747,14 +4286,14 @@
       </p:sp>
       <p:sp>
         <p:nvSpPr>
-          <p:cNvPr id="5" name="TextBox 4"/>
+          <p:cNvPr id="6" name="TextBox 5"/>
           <p:cNvSpPr txBox="1"/>
           <p:nvPr/>
         </p:nvSpPr>
         <p:spPr>
           <a:xfrm>
-            <a:off x="457200" y="2011680"/>
-            <a:ext cx="11247120" cy="1097280"/>
+            <a:off x="457200" y="3154680"/>
+            <a:ext cx="11277295" cy="457200"/>
           </a:xfrm>
           <a:prstGeom prst="rect">
             <a:avLst/>
@@ -3762,7 +4301,7 @@
           <a:noFill/>
         </p:spPr>
         <p:txBody>
-          <a:bodyPr wrap="square">
+          <a:bodyPr wrap="square" lIns="45720" rIns="45720">
             <a:spAutoFit/>
           </a:bodyPr>
           <a:lstStyle/>
@@ -3773,27 +4312,27 @@
               </a:defRPr>
             </a:pPr>
             <a:r>
-              <a:rPr sz="3400" b="1">
+              <a:rPr sz="1600" b="0">
                 <a:solidFill>
-                  <a:srgbClr val="25342A"/>
+                  <a:srgbClr val="5F6F63"/>
                 </a:solidFill>
                 <a:latin typeface="Roboto"/>
               </a:rPr>
-              <a:t>How many months of runway do we have?</a:t>
-            </a:r>
-          </a:p>
-        </p:txBody>
-      </p:sp>
-      <p:sp>
-        <p:nvSpPr>
-          <p:cNvPr id="6" name="TextBox 5"/>
+              <a:t>Sample Community Services Ltd</a:t>
+            </a:r>
+          </a:p>
+        </p:txBody>
+      </p:sp>
+      <p:sp>
+        <p:nvSpPr>
+          <p:cNvPr id="7" name="TextBox 6"/>
           <p:cNvSpPr txBox="1"/>
           <p:nvPr/>
         </p:nvSpPr>
         <p:spPr>
           <a:xfrm>
-            <a:off x="457200" y="3154680"/>
-            <a:ext cx="11247120" cy="457200"/>
+            <a:off x="457200" y="3703320"/>
+            <a:ext cx="11277295" cy="535940"/>
           </a:xfrm>
           <a:prstGeom prst="rect">
             <a:avLst/>
@@ -3801,7 +4340,7 @@
           <a:noFill/>
         </p:spPr>
         <p:txBody>
-          <a:bodyPr wrap="square">
+          <a:bodyPr wrap="square" lIns="45720" rIns="45720">
             <a:spAutoFit/>
           </a:bodyPr>
           <a:lstStyle/>
@@ -3812,27 +4351,27 @@
               </a:defRPr>
             </a:pPr>
             <a:r>
-              <a:rPr sz="1600" b="0">
+              <a:rPr sz="1400" b="0">
                 <a:solidFill>
-                  <a:srgbClr val="5F6F63"/>
+                  <a:srgbClr val="25342A"/>
                 </a:solidFill>
                 <a:latin typeface="Roboto"/>
               </a:rPr>
-              <a:t>Sample Community Services Ltd</a:t>
-            </a:r>
-          </a:p>
-        </p:txBody>
-      </p:sp>
-      <p:sp>
-        <p:nvSpPr>
-          <p:cNvPr id="7" name="TextBox 6"/>
+              <a:t>Period: September 2026. How long the organisation could keep going on its own money: cash at bank, less unspent grant money (which belongs to the funders' programs), divided by a month's spending.</a:t>
+            </a:r>
+          </a:p>
+        </p:txBody>
+      </p:sp>
+      <p:sp>
+        <p:nvSpPr>
+          <p:cNvPr id="8" name="TextBox 7"/>
           <p:cNvSpPr txBox="1"/>
           <p:nvPr/>
         </p:nvSpPr>
         <p:spPr>
           <a:xfrm>
-            <a:off x="457200" y="3703320"/>
-            <a:ext cx="11247120" cy="1097280"/>
+            <a:off x="457200" y="4330700"/>
+            <a:ext cx="11277295" cy="1097280"/>
           </a:xfrm>
           <a:prstGeom prst="rect">
             <a:avLst/>
@@ -3840,7 +4379,7 @@
           <a:noFill/>
         </p:spPr>
         <p:txBody>
-          <a:bodyPr wrap="square">
+          <a:bodyPr wrap="square" lIns="45720" rIns="45720">
             <a:spAutoFit/>
           </a:bodyPr>
           <a:lstStyle/>
@@ -3851,27 +4390,75 @@
               </a:defRPr>
             </a:pPr>
             <a:r>
-              <a:rPr sz="1400" b="0">
+              <a:rPr sz="1100" b="0">
                 <a:solidFill>
-                  <a:srgbClr val="25342A"/>
+                  <a:srgbClr val="5F6F63"/>
                 </a:solidFill>
                 <a:latin typeface="Roboto"/>
               </a:rPr>
-              <a:t>Period: September 2026. How long the organisation could keep going on its own money: cash at bank, less unspent grant money (which belongs to the funders' programs), divided by a month's spending.</a:t>
-            </a:r>
-          </a:p>
-        </p:txBody>
-      </p:sp>
-      <p:sp>
-        <p:nvSpPr>
-          <p:cNvPr id="8" name="TextBox 7"/>
+              <a:t>How final is this data?</a:t>
+            </a:r>
+          </a:p>
+          <a:p>
+            <a:pPr>
+              <a:defRPr>
+                <a:latin typeface="Roboto"/>
+              </a:defRPr>
+            </a:pPr>
+            <a:r>
+              <a:rPr sz="1100" b="0">
+                <a:solidFill>
+                  <a:srgbClr val="5F6F63"/>
+                </a:solidFill>
+                <a:latin typeface="Roboto"/>
+              </a:rPr>
+              <a:t>August 2026: Locked. August 2026 is locked (closed 2 Sep 2026). These numbers won't change.</a:t>
+            </a:r>
+          </a:p>
+          <a:p>
+            <a:pPr>
+              <a:defRPr>
+                <a:latin typeface="Roboto"/>
+              </a:defRPr>
+            </a:pPr>
+            <a:r>
+              <a:rPr sz="1100" b="0">
+                <a:solidFill>
+                  <a:srgbClr val="5F6F63"/>
+                </a:solidFill>
+                <a:latin typeface="Roboto"/>
+              </a:rPr>
+              <a:t>September 2026: Locked. September 2026 is locked (closed 2 Oct 2026). These numbers won't change.</a:t>
+            </a:r>
+          </a:p>
+          <a:p>
+            <a:pPr>
+              <a:defRPr>
+                <a:latin typeface="Roboto"/>
+              </a:defRPr>
+            </a:pPr>
+            <a:r>
+              <a:rPr sz="1100" b="0">
+                <a:solidFill>
+                  <a:srgbClr val="5F6F63"/>
+                </a:solidFill>
+                <a:latin typeface="Roboto"/>
+              </a:rPr>
+              <a:t>October 2026: Incomplete. October 2026 is still in progress: figures to 6 Oct only.</a:t>
+            </a:r>
+          </a:p>
+        </p:txBody>
+      </p:sp>
+      <p:sp>
+        <p:nvSpPr>
+          <p:cNvPr id="9" name="TextBox 8"/>
           <p:cNvSpPr txBox="1"/>
           <p:nvPr/>
         </p:nvSpPr>
         <p:spPr>
           <a:xfrm>
-            <a:off x="457200" y="4937760"/>
-            <a:ext cx="11247120" cy="1097280"/>
+            <a:off x="457200" y="6492240"/>
+            <a:ext cx="2926080" cy="274320"/>
           </a:xfrm>
           <a:prstGeom prst="rect">
             <a:avLst/>
@@ -3879,7 +4466,7 @@
           <a:noFill/>
         </p:spPr>
         <p:txBody>
-          <a:bodyPr wrap="square">
+          <a:bodyPr wrap="square" lIns="45720" rIns="45720">
             <a:spAutoFit/>
           </a:bodyPr>
           <a:lstStyle/>
@@ -3890,75 +4477,27 @@
               </a:defRPr>
             </a:pPr>
             <a:r>
-              <a:rPr sz="1100" b="0">
+              <a:rPr sz="900" b="0">
                 <a:solidFill>
                   <a:srgbClr val="5F6F63"/>
                 </a:solidFill>
                 <a:latin typeface="Roboto"/>
               </a:rPr>
-              <a:t>How final is this data?</a:t>
-            </a:r>
-          </a:p>
-          <a:p>
-            <a:pPr>
-              <a:defRPr>
-                <a:latin typeface="Roboto"/>
-              </a:defRPr>
-            </a:pPr>
-            <a:r>
-              <a:rPr sz="1100" b="0">
-                <a:solidFill>
-                  <a:srgbClr val="5F6F63"/>
-                </a:solidFill>
-                <a:latin typeface="Roboto"/>
-              </a:rPr>
-              <a:t>August 2026: Locked. August 2026 is locked (closed 2 Sep 2026). These numbers won't change.</a:t>
-            </a:r>
-          </a:p>
-          <a:p>
-            <a:pPr>
-              <a:defRPr>
-                <a:latin typeface="Roboto"/>
-              </a:defRPr>
-            </a:pPr>
-            <a:r>
-              <a:rPr sz="1100" b="0">
-                <a:solidFill>
-                  <a:srgbClr val="5F6F63"/>
-                </a:solidFill>
-                <a:latin typeface="Roboto"/>
-              </a:rPr>
-              <a:t>September 2026: Locked. September 2026 is locked (closed 2 Oct 2026). These numbers won't change.</a:t>
-            </a:r>
-          </a:p>
-          <a:p>
-            <a:pPr>
-              <a:defRPr>
-                <a:latin typeface="Roboto"/>
-              </a:defRPr>
-            </a:pPr>
-            <a:r>
-              <a:rPr sz="1100" b="0">
-                <a:solidFill>
-                  <a:srgbClr val="5F6F63"/>
-                </a:solidFill>
-                <a:latin typeface="Roboto"/>
-              </a:rPr>
-              <a:t>October 2026: Incomplete. October 2026 is still in progress: figures to 6 Oct only.</a:t>
-            </a:r>
-          </a:p>
-        </p:txBody>
-      </p:sp>
-      <p:sp>
-        <p:nvSpPr>
-          <p:cNvPr id="9" name="TextBox 8"/>
+              <a:t>runway.pptx</a:t>
+            </a:r>
+          </a:p>
+        </p:txBody>
+      </p:sp>
+      <p:sp>
+        <p:nvSpPr>
+          <p:cNvPr id="10" name="TextBox 9"/>
           <p:cNvSpPr txBox="1"/>
           <p:nvPr/>
         </p:nvSpPr>
         <p:spPr>
           <a:xfrm>
-            <a:off x="457200" y="6492240"/>
-            <a:ext cx="3657600" cy="274320"/>
+            <a:off x="3108960" y="6492240"/>
+            <a:ext cx="5943600" cy="274320"/>
           </a:xfrm>
           <a:prstGeom prst="rect">
             <a:avLst/>
@@ -3966,12 +4505,12 @@
           <a:noFill/>
         </p:spPr>
         <p:txBody>
-          <a:bodyPr wrap="square">
+          <a:bodyPr wrap="square" lIns="45720" rIns="45720">
             <a:spAutoFit/>
           </a:bodyPr>
           <a:lstStyle/>
           <a:p>
-            <a:pPr>
+            <a:pPr algn="ctr">
               <a:defRPr>
                 <a:latin typeface="Roboto"/>
               </a:defRPr>
@@ -3983,21 +4522,21 @@
                 </a:solidFill>
                 <a:latin typeface="Roboto"/>
               </a:rPr>
-              <a:t>runway.pptx</a:t>
-            </a:r>
-          </a:p>
-        </p:txBody>
-      </p:sp>
-      <p:sp>
-        <p:nvSpPr>
-          <p:cNvPr id="10" name="TextBox 9"/>
+              <a:t>Data retrieved 2pm, Tue 6 Oct 2026 · Generated 8 Oct 2026, 9:35am · Sample data · Made with Python (python-pptx)</a:t>
+            </a:r>
+          </a:p>
+        </p:txBody>
+      </p:sp>
+      <p:sp>
+        <p:nvSpPr>
+          <p:cNvPr id="11" name="TextBox 10"/>
           <p:cNvSpPr txBox="1"/>
           <p:nvPr/>
         </p:nvSpPr>
         <p:spPr>
           <a:xfrm>
-            <a:off x="4297680" y="6492240"/>
-            <a:ext cx="3657600" cy="274320"/>
+            <a:off x="8503920" y="6492240"/>
+            <a:ext cx="3200400" cy="274320"/>
           </a:xfrm>
           <a:prstGeom prst="rect">
             <a:avLst/>
@@ -4005,12 +4544,12 @@
           <a:noFill/>
         </p:spPr>
         <p:txBody>
-          <a:bodyPr wrap="square">
+          <a:bodyPr wrap="square" lIns="45720" rIns="45720">
             <a:spAutoFit/>
           </a:bodyPr>
           <a:lstStyle/>
           <a:p>
-            <a:pPr algn="ctr">
+            <a:pPr algn="r">
               <a:defRPr>
                 <a:latin typeface="Roboto"/>
               </a:defRPr>
@@ -4022,46 +4561,7 @@
                 </a:solidFill>
                 <a:latin typeface="Roboto"/>
               </a:rPr>
-              <a:t>Data retrieved 2pm, Tue 6 Oct 2026 · Sample data</a:t>
-            </a:r>
-          </a:p>
-        </p:txBody>
-      </p:sp>
-      <p:sp>
-        <p:nvSpPr>
-          <p:cNvPr id="11" name="TextBox 10"/>
-          <p:cNvSpPr txBox="1"/>
-          <p:nvPr/>
-        </p:nvSpPr>
-        <p:spPr>
-          <a:xfrm>
-            <a:off x="8503920" y="6492240"/>
-            <a:ext cx="3200400" cy="274320"/>
-          </a:xfrm>
-          <a:prstGeom prst="rect">
-            <a:avLst/>
-          </a:prstGeom>
-          <a:noFill/>
-        </p:spPr>
-        <p:txBody>
-          <a:bodyPr wrap="square">
-            <a:spAutoFit/>
-          </a:bodyPr>
-          <a:lstStyle/>
-          <a:p>
-            <a:pPr algn="r">
-              <a:defRPr>
-                <a:latin typeface="Roboto"/>
-              </a:defRPr>
-            </a:pPr>
-            <a:r>
-              <a:rPr sz="900" b="0">
-                <a:solidFill>
-                  <a:srgbClr val="5F6F63"/>
-                </a:solidFill>
-                <a:latin typeface="Roboto"/>
-              </a:rPr>
-              <a:t>Slide 1 of 4</a:t>
+              <a:t>Slide 1 of 2</a:t>
             </a:r>
           </a:p>
         </p:txBody>
@@ -4086,7 +4586,44 @@
       <p:grpSpPr/>
       <p:sp>
         <p:nvSpPr>
-          <p:cNvPr id="2" name="Rectangle 1"/>
+          <p:cNvPr id="2" name="Title 1"/>
+          <p:cNvSpPr>
+            <a:spLocks noGrp="1"/>
+          </p:cNvSpPr>
+          <p:nvPr>
+            <p:ph type="title"/>
+          </p:nvPr>
+        </p:nvSpPr>
+        <p:spPr>
+          <a:xfrm>
+            <a:off x="457200" y="384048"/>
+            <a:ext cx="11277295" cy="475488"/>
+          </a:xfrm>
+        </p:spPr>
+        <p:txBody>
+          <a:bodyPr wrap="square" lIns="45720" rIns="45720" tIns="0" bIns="0" anchor="t"/>
+          <a:lstStyle/>
+          <a:p>
+            <a:pPr algn="l">
+              <a:defRPr>
+                <a:latin typeface="Roboto"/>
+              </a:defRPr>
+            </a:pPr>
+            <a:r>
+              <a:rPr sz="2400" b="1">
+                <a:solidFill>
+                  <a:srgbClr val="25342A"/>
+                </a:solidFill>
+                <a:latin typeface="Roboto"/>
+              </a:rPr>
+              <a:t>How many months of runway do we have?</a:t>
+            </a:r>
+          </a:p>
+        </p:txBody>
+      </p:sp>
+      <p:sp>
+        <p:nvSpPr>
+          <p:cNvPr id="3" name="Rectangle 2"/>
           <p:cNvSpPr/>
           <p:nvPr/>
         </p:nvSpPr>
@@ -4133,14 +4670,14 @@
       </p:sp>
       <p:sp>
         <p:nvSpPr>
-          <p:cNvPr id="3" name="TextBox 2"/>
+          <p:cNvPr id="4" name="TextBox 3"/>
           <p:cNvSpPr txBox="1"/>
           <p:nvPr/>
         </p:nvSpPr>
         <p:spPr>
           <a:xfrm>
-            <a:off x="457200" y="164592"/>
-            <a:ext cx="7315200" cy="274320"/>
+            <a:off x="457200" y="146304"/>
+            <a:ext cx="8229600" cy="256032"/>
           </a:xfrm>
           <a:prstGeom prst="rect">
             <a:avLst/>
@@ -4148,7 +4685,7 @@
           <a:noFill/>
         </p:spPr>
         <p:txBody>
-          <a:bodyPr wrap="square">
+          <a:bodyPr wrap="square" lIns="45720" rIns="45720">
             <a:spAutoFit/>
           </a:bodyPr>
           <a:lstStyle/>
@@ -4172,14 +4709,14 @@
       </p:sp>
       <p:sp>
         <p:nvSpPr>
-          <p:cNvPr id="4" name="TextBox 3"/>
+          <p:cNvPr id="5" name="TextBox 4"/>
           <p:cNvSpPr txBox="1"/>
           <p:nvPr/>
         </p:nvSpPr>
         <p:spPr>
           <a:xfrm>
-            <a:off x="457200" y="411480"/>
-            <a:ext cx="11247120" cy="548640"/>
+            <a:off x="457200" y="914400"/>
+            <a:ext cx="11277295" cy="263652"/>
           </a:xfrm>
           <a:prstGeom prst="rect">
             <a:avLst/>
@@ -4187,7 +4724,7 @@
           <a:noFill/>
         </p:spPr>
         <p:txBody>
-          <a:bodyPr wrap="square">
+          <a:bodyPr wrap="square" lIns="45720" rIns="45720">
             <a:spAutoFit/>
           </a:bodyPr>
           <a:lstStyle/>
@@ -4198,27 +4735,27 @@
               </a:defRPr>
             </a:pPr>
             <a:r>
-              <a:rPr sz="2400" b="1">
+              <a:rPr sz="1200" b="0">
                 <a:solidFill>
-                  <a:srgbClr val="25342A"/>
+                  <a:srgbClr val="5F6F63"/>
                 </a:solidFill>
                 <a:latin typeface="Roboto"/>
               </a:rPr>
-              <a:t>Headline numbers</a:t>
-            </a:r>
-          </a:p>
-        </p:txBody>
-      </p:sp>
-      <p:sp>
-        <p:nvSpPr>
-          <p:cNvPr id="5" name="Rectangle 4"/>
+              <a:t>Cash at bank, every day (1 Aug to 30 Sep)</a:t>
+            </a:r>
+          </a:p>
+        </p:txBody>
+      </p:sp>
+      <p:sp>
+        <p:nvSpPr>
+          <p:cNvPr id="6" name="Rectangle 5"/>
           <p:cNvSpPr/>
           <p:nvPr/>
         </p:nvSpPr>
         <p:spPr>
           <a:xfrm>
-            <a:off x="457200" y="1645920"/>
-            <a:ext cx="2613583" cy="2011680"/>
+            <a:off x="457200" y="1278636"/>
+            <a:ext cx="2647873" cy="1188720"/>
           </a:xfrm>
           <a:prstGeom prst="rect">
             <a:avLst/>
@@ -4260,14 +4797,14 @@
       </p:sp>
       <p:sp>
         <p:nvSpPr>
-          <p:cNvPr id="6" name="TextBox 5"/>
+          <p:cNvPr id="7" name="TextBox 6"/>
           <p:cNvSpPr txBox="1"/>
           <p:nvPr/>
         </p:nvSpPr>
         <p:spPr>
           <a:xfrm>
-            <a:off x="640080" y="1783080"/>
-            <a:ext cx="2247823" cy="457200"/>
+            <a:off x="594360" y="1351788"/>
+            <a:ext cx="2373553" cy="384048"/>
           </a:xfrm>
           <a:prstGeom prst="rect">
             <a:avLst/>
@@ -4275,7 +4812,7 @@
           <a:noFill/>
         </p:spPr>
         <p:txBody>
-          <a:bodyPr wrap="square">
+          <a:bodyPr wrap="square" lIns="45720" rIns="45720">
             <a:spAutoFit/>
           </a:bodyPr>
           <a:lstStyle/>
@@ -4286,7 +4823,7 @@
               </a:defRPr>
             </a:pPr>
             <a:r>
-              <a:rPr sz="1200" b="0">
+              <a:rPr sz="1100" b="0">
                 <a:solidFill>
                   <a:srgbClr val="5F6F63"/>
                 </a:solidFill>
@@ -4299,14 +4836,14 @@
       </p:sp>
       <p:sp>
         <p:nvSpPr>
-          <p:cNvPr id="7" name="TextBox 6"/>
+          <p:cNvPr id="8" name="TextBox 7"/>
           <p:cNvSpPr txBox="1"/>
           <p:nvPr/>
         </p:nvSpPr>
         <p:spPr>
           <a:xfrm>
-            <a:off x="640080" y="2240280"/>
-            <a:ext cx="2247823" cy="731520"/>
+            <a:off x="594360" y="1717548"/>
+            <a:ext cx="2373553" cy="502920"/>
           </a:xfrm>
           <a:prstGeom prst="rect">
             <a:avLst/>
@@ -4314,7 +4851,7 @@
           <a:noFill/>
         </p:spPr>
         <p:txBody>
-          <a:bodyPr wrap="square">
+          <a:bodyPr wrap="square" lIns="45720" rIns="45720">
             <a:spAutoFit/>
           </a:bodyPr>
           <a:lstStyle/>
@@ -4325,9 +4862,9 @@
               </a:defRPr>
             </a:pPr>
             <a:r>
-              <a:rPr sz="3000" b="1">
+              <a:rPr sz="2200" b="1">
                 <a:solidFill>
-                  <a:srgbClr val="2F7A5D"/>
+                  <a:srgbClr val="B42318"/>
                 </a:solidFill>
                 <a:latin typeface="Roboto"/>
               </a:rPr>
@@ -4338,14 +4875,14 @@
       </p:sp>
       <p:sp>
         <p:nvSpPr>
-          <p:cNvPr id="8" name="TextBox 7"/>
+          <p:cNvPr id="9" name="TextBox 8"/>
           <p:cNvSpPr txBox="1"/>
           <p:nvPr/>
         </p:nvSpPr>
         <p:spPr>
           <a:xfrm>
-            <a:off x="640080" y="3017520"/>
-            <a:ext cx="2247823" cy="548640"/>
+            <a:off x="594360" y="2083308"/>
+            <a:ext cx="2373553" cy="329184"/>
           </a:xfrm>
           <a:prstGeom prst="rect">
             <a:avLst/>
@@ -4353,7 +4890,7 @@
           <a:noFill/>
         </p:spPr>
         <p:txBody>
-          <a:bodyPr wrap="square">
+          <a:bodyPr wrap="square" lIns="45720" rIns="45720">
             <a:spAutoFit/>
           </a:bodyPr>
           <a:lstStyle/>
@@ -4364,7 +4901,7 @@
               </a:defRPr>
             </a:pPr>
             <a:r>
-              <a:rPr sz="1100" b="0">
+              <a:rPr sz="1000" b="0">
                 <a:solidFill>
                   <a:srgbClr val="5F6F63"/>
                 </a:solidFill>
@@ -4377,14 +4914,14 @@
       </p:sp>
       <p:sp>
         <p:nvSpPr>
-          <p:cNvPr id="9" name="Rectangle 8"/>
+          <p:cNvPr id="10" name="Rectangle 9"/>
           <p:cNvSpPr/>
           <p:nvPr/>
         </p:nvSpPr>
         <p:spPr>
           <a:xfrm>
-            <a:off x="3345103" y="1645920"/>
-            <a:ext cx="2613583" cy="2011680"/>
+            <a:off x="3333673" y="1278636"/>
+            <a:ext cx="2647873" cy="1188720"/>
           </a:xfrm>
           <a:prstGeom prst="rect">
             <a:avLst/>
@@ -4426,14 +4963,14 @@
       </p:sp>
       <p:sp>
         <p:nvSpPr>
-          <p:cNvPr id="10" name="TextBox 9"/>
+          <p:cNvPr id="11" name="TextBox 10"/>
           <p:cNvSpPr txBox="1"/>
           <p:nvPr/>
         </p:nvSpPr>
         <p:spPr>
           <a:xfrm>
-            <a:off x="3527983" y="1783080"/>
-            <a:ext cx="2247823" cy="457200"/>
+            <a:off x="3470833" y="1351788"/>
+            <a:ext cx="2373553" cy="384048"/>
           </a:xfrm>
           <a:prstGeom prst="rect">
             <a:avLst/>
@@ -4441,7 +4978,7 @@
           <a:noFill/>
         </p:spPr>
         <p:txBody>
-          <a:bodyPr wrap="square">
+          <a:bodyPr wrap="square" lIns="45720" rIns="45720">
             <a:spAutoFit/>
           </a:bodyPr>
           <a:lstStyle/>
@@ -4452,7 +4989,7 @@
               </a:defRPr>
             </a:pPr>
             <a:r>
-              <a:rPr sz="1200" b="0">
+              <a:rPr sz="1100" b="0">
                 <a:solidFill>
                   <a:srgbClr val="5F6F63"/>
                 </a:solidFill>
@@ -4465,14 +5002,14 @@
       </p:sp>
       <p:sp>
         <p:nvSpPr>
-          <p:cNvPr id="11" name="TextBox 10"/>
+          <p:cNvPr id="12" name="TextBox 11"/>
           <p:cNvSpPr txBox="1"/>
           <p:nvPr/>
         </p:nvSpPr>
         <p:spPr>
           <a:xfrm>
-            <a:off x="3527983" y="2240280"/>
-            <a:ext cx="2247823" cy="731520"/>
+            <a:off x="3470833" y="1717548"/>
+            <a:ext cx="2373553" cy="502920"/>
           </a:xfrm>
           <a:prstGeom prst="rect">
             <a:avLst/>
@@ -4480,7 +5017,7 @@
           <a:noFill/>
         </p:spPr>
         <p:txBody>
-          <a:bodyPr wrap="square">
+          <a:bodyPr wrap="square" lIns="45720" rIns="45720">
             <a:spAutoFit/>
           </a:bodyPr>
           <a:lstStyle/>
@@ -4491,7 +5028,7 @@
               </a:defRPr>
             </a:pPr>
             <a:r>
-              <a:rPr sz="3000" b="1">
+              <a:rPr sz="2200" b="1">
                 <a:solidFill>
                   <a:srgbClr val="2F7A5D"/>
                 </a:solidFill>
@@ -4504,14 +5041,14 @@
       </p:sp>
       <p:sp>
         <p:nvSpPr>
-          <p:cNvPr id="12" name="TextBox 11"/>
+          <p:cNvPr id="13" name="TextBox 12"/>
           <p:cNvSpPr txBox="1"/>
           <p:nvPr/>
         </p:nvSpPr>
         <p:spPr>
           <a:xfrm>
-            <a:off x="3527983" y="3017520"/>
-            <a:ext cx="2247823" cy="548640"/>
+            <a:off x="3470833" y="2083308"/>
+            <a:ext cx="2373553" cy="329184"/>
           </a:xfrm>
           <a:prstGeom prst="rect">
             <a:avLst/>
@@ -4519,7 +5056,7 @@
           <a:noFill/>
         </p:spPr>
         <p:txBody>
-          <a:bodyPr wrap="square">
+          <a:bodyPr wrap="square" lIns="45720" rIns="45720">
             <a:spAutoFit/>
           </a:bodyPr>
           <a:lstStyle/>
@@ -4530,7 +5067,7 @@
               </a:defRPr>
             </a:pPr>
             <a:r>
-              <a:rPr sz="1100" b="0">
+              <a:rPr sz="1000" b="0">
                 <a:solidFill>
                   <a:srgbClr val="5F6F63"/>
                 </a:solidFill>
@@ -4543,14 +5080,14 @@
       </p:sp>
       <p:sp>
         <p:nvSpPr>
-          <p:cNvPr id="13" name="Rectangle 12"/>
+          <p:cNvPr id="14" name="Rectangle 13"/>
           <p:cNvSpPr/>
           <p:nvPr/>
         </p:nvSpPr>
         <p:spPr>
           <a:xfrm>
-            <a:off x="6233007" y="1645920"/>
-            <a:ext cx="2613583" cy="2011680"/>
+            <a:off x="6210147" y="1278636"/>
+            <a:ext cx="2647873" cy="1188720"/>
           </a:xfrm>
           <a:prstGeom prst="rect">
             <a:avLst/>
@@ -4592,14 +5129,14 @@
       </p:sp>
       <p:sp>
         <p:nvSpPr>
-          <p:cNvPr id="14" name="TextBox 13"/>
+          <p:cNvPr id="15" name="TextBox 14"/>
           <p:cNvSpPr txBox="1"/>
           <p:nvPr/>
         </p:nvSpPr>
         <p:spPr>
           <a:xfrm>
-            <a:off x="6415887" y="1783080"/>
-            <a:ext cx="2247823" cy="457200"/>
+            <a:off x="6347307" y="1351788"/>
+            <a:ext cx="2373553" cy="384048"/>
           </a:xfrm>
           <a:prstGeom prst="rect">
             <a:avLst/>
@@ -4607,7 +5144,7 @@
           <a:noFill/>
         </p:spPr>
         <p:txBody>
-          <a:bodyPr wrap="square">
+          <a:bodyPr wrap="square" lIns="45720" rIns="45720">
             <a:spAutoFit/>
           </a:bodyPr>
           <a:lstStyle/>
@@ -4618,7 +5155,7 @@
               </a:defRPr>
             </a:pPr>
             <a:r>
-              <a:rPr sz="1200" b="0">
+              <a:rPr sz="1100" b="0">
                 <a:solidFill>
                   <a:srgbClr val="5F6F63"/>
                 </a:solidFill>
@@ -4631,14 +5168,14 @@
       </p:sp>
       <p:sp>
         <p:nvSpPr>
-          <p:cNvPr id="15" name="TextBox 14"/>
+          <p:cNvPr id="16" name="TextBox 15"/>
           <p:cNvSpPr txBox="1"/>
           <p:nvPr/>
         </p:nvSpPr>
         <p:spPr>
           <a:xfrm>
-            <a:off x="6415887" y="2240280"/>
-            <a:ext cx="2247823" cy="731520"/>
+            <a:off x="6347307" y="1717548"/>
+            <a:ext cx="2373553" cy="502920"/>
           </a:xfrm>
           <a:prstGeom prst="rect">
             <a:avLst/>
@@ -4646,7 +5183,7 @@
           <a:noFill/>
         </p:spPr>
         <p:txBody>
-          <a:bodyPr wrap="square">
+          <a:bodyPr wrap="square" lIns="45720" rIns="45720">
             <a:spAutoFit/>
           </a:bodyPr>
           <a:lstStyle/>
@@ -4657,9 +5194,9 @@
               </a:defRPr>
             </a:pPr>
             <a:r>
-              <a:rPr sz="3000" b="1">
+              <a:rPr sz="2200" b="1">
                 <a:solidFill>
-                  <a:srgbClr val="2F7A5D"/>
+                  <a:srgbClr val="B42318"/>
                 </a:solidFill>
                 <a:latin typeface="Roboto"/>
               </a:rPr>
@@ -4670,14 +5207,14 @@
       </p:sp>
       <p:sp>
         <p:nvSpPr>
-          <p:cNvPr id="16" name="TextBox 15"/>
+          <p:cNvPr id="17" name="TextBox 16"/>
           <p:cNvSpPr txBox="1"/>
           <p:nvPr/>
         </p:nvSpPr>
         <p:spPr>
           <a:xfrm>
-            <a:off x="6415887" y="3017520"/>
-            <a:ext cx="2247823" cy="548640"/>
+            <a:off x="6347307" y="2083308"/>
+            <a:ext cx="2373553" cy="329184"/>
           </a:xfrm>
           <a:prstGeom prst="rect">
             <a:avLst/>
@@ -4685,7 +5222,7 @@
           <a:noFill/>
         </p:spPr>
         <p:txBody>
-          <a:bodyPr wrap="square">
+          <a:bodyPr wrap="square" lIns="45720" rIns="45720">
             <a:spAutoFit/>
           </a:bodyPr>
           <a:lstStyle/>
@@ -4696,7 +5233,7 @@
               </a:defRPr>
             </a:pPr>
             <a:r>
-              <a:rPr sz="1100" b="0">
+              <a:rPr sz="1000" b="0">
                 <a:solidFill>
                   <a:srgbClr val="5F6F63"/>
                 </a:solidFill>
@@ -4709,14 +5246,14 @@
       </p:sp>
       <p:sp>
         <p:nvSpPr>
-          <p:cNvPr id="17" name="Rectangle 16"/>
+          <p:cNvPr id="18" name="Rectangle 17"/>
           <p:cNvSpPr/>
           <p:nvPr/>
         </p:nvSpPr>
         <p:spPr>
           <a:xfrm>
-            <a:off x="9120911" y="1645920"/>
-            <a:ext cx="2613583" cy="2011680"/>
+            <a:off x="9086621" y="1278636"/>
+            <a:ext cx="2647873" cy="1188720"/>
           </a:xfrm>
           <a:prstGeom prst="rect">
             <a:avLst/>
@@ -4758,14 +5295,14 @@
       </p:sp>
       <p:sp>
         <p:nvSpPr>
-          <p:cNvPr id="18" name="TextBox 17"/>
+          <p:cNvPr id="19" name="TextBox 18"/>
           <p:cNvSpPr txBox="1"/>
           <p:nvPr/>
         </p:nvSpPr>
         <p:spPr>
           <a:xfrm>
-            <a:off x="9303791" y="1783080"/>
-            <a:ext cx="2247823" cy="457200"/>
+            <a:off x="9223781" y="1351788"/>
+            <a:ext cx="2373553" cy="384048"/>
           </a:xfrm>
           <a:prstGeom prst="rect">
             <a:avLst/>
@@ -4773,7 +5310,7 @@
           <a:noFill/>
         </p:spPr>
         <p:txBody>
-          <a:bodyPr wrap="square">
+          <a:bodyPr wrap="square" lIns="45720" rIns="45720">
             <a:spAutoFit/>
           </a:bodyPr>
           <a:lstStyle/>
@@ -4784,7 +5321,7 @@
               </a:defRPr>
             </a:pPr>
             <a:r>
-              <a:rPr sz="1200" b="0">
+              <a:rPr sz="1100" b="0">
                 <a:solidFill>
                   <a:srgbClr val="5F6F63"/>
                 </a:solidFill>
@@ -4797,14 +5334,14 @@
       </p:sp>
       <p:sp>
         <p:nvSpPr>
-          <p:cNvPr id="19" name="TextBox 18"/>
+          <p:cNvPr id="20" name="TextBox 19"/>
           <p:cNvSpPr txBox="1"/>
           <p:nvPr/>
         </p:nvSpPr>
         <p:spPr>
           <a:xfrm>
-            <a:off x="9303791" y="2240280"/>
-            <a:ext cx="2247823" cy="731520"/>
+            <a:off x="9223781" y="1717548"/>
+            <a:ext cx="2373553" cy="502920"/>
           </a:xfrm>
           <a:prstGeom prst="rect">
             <a:avLst/>
@@ -4812,7 +5349,7 @@
           <a:noFill/>
         </p:spPr>
         <p:txBody>
-          <a:bodyPr wrap="square">
+          <a:bodyPr wrap="square" lIns="45720" rIns="45720">
             <a:spAutoFit/>
           </a:bodyPr>
           <a:lstStyle/>
@@ -4823,9 +5360,9 @@
               </a:defRPr>
             </a:pPr>
             <a:r>
-              <a:rPr sz="3000" b="1">
+              <a:rPr sz="2200" b="1">
                 <a:solidFill>
-                  <a:srgbClr val="2F7A5D"/>
+                  <a:srgbClr val="B42318"/>
                 </a:solidFill>
                 <a:latin typeface="Roboto"/>
               </a:rPr>
@@ -4836,14 +5373,14 @@
       </p:sp>
       <p:sp>
         <p:nvSpPr>
-          <p:cNvPr id="20" name="TextBox 19"/>
+          <p:cNvPr id="21" name="TextBox 20"/>
           <p:cNvSpPr txBox="1"/>
           <p:nvPr/>
         </p:nvSpPr>
         <p:spPr>
           <a:xfrm>
-            <a:off x="9303791" y="3017520"/>
-            <a:ext cx="2247823" cy="548640"/>
+            <a:off x="9223781" y="2083308"/>
+            <a:ext cx="2373553" cy="329184"/>
           </a:xfrm>
           <a:prstGeom prst="rect">
             <a:avLst/>
@@ -4851,7 +5388,7 @@
           <a:noFill/>
         </p:spPr>
         <p:txBody>
-          <a:bodyPr wrap="square">
+          <a:bodyPr wrap="square" lIns="45720" rIns="45720">
             <a:spAutoFit/>
           </a:bodyPr>
           <a:lstStyle/>
@@ -4862,7 +5399,7 @@
               </a:defRPr>
             </a:pPr>
             <a:r>
-              <a:rPr sz="1100" b="0">
+              <a:rPr sz="1000" b="0">
                 <a:solidFill>
                   <a:srgbClr val="5F6F63"/>
                 </a:solidFill>
@@ -4873,16 +5410,70 @@
           </a:p>
         </p:txBody>
       </p:sp>
-      <p:sp>
-        <p:nvSpPr>
-          <p:cNvPr id="21" name="TextBox 20"/>
+      <p:graphicFrame>
+        <p:nvGraphicFramePr>
+          <p:cNvPr id="22" name="Chart 21"/>
+          <p:cNvGraphicFramePr>
+            <a:graphicFrameLocks noGrp="1"/>
+          </p:cNvGraphicFramePr>
+          <p:nvPr/>
+        </p:nvGraphicFramePr>
+        <p:xfrm>
+          <a:off x="457200" y="2604516"/>
+          <a:ext cx="11277295" cy="2516124"/>
+        </p:xfrm>
+        <a:graphic>
+          <a:graphicData uri="http://schemas.openxmlformats.org/drawingml/2006/chart">
+            <c:chart xmlns:c="http://schemas.openxmlformats.org/drawingml/2006/chart" r:id="rId3"/>
+          </a:graphicData>
+        </a:graphic>
+      </p:graphicFrame>
+      <p:cxnSp>
+        <p:nvCxnSpPr>
+          <p:cNvPr id="23" name="Connector 22"/>
+          <p:cNvCxnSpPr/>
+          <p:nvPr/>
+        </p:nvCxnSpPr>
+        <p:spPr>
+          <a:xfrm>
+            <a:off x="1697702" y="3120824"/>
+            <a:ext cx="9698474" cy="0"/>
+          </a:xfrm>
+          <a:prstGeom prst="line">
+            <a:avLst/>
+          </a:prstGeom>
+          <a:ln w="19050">
+            <a:solidFill>
+              <a:srgbClr val="25342A"/>
+            </a:solidFill>
+            <a:prstDash val="dash"/>
+          </a:ln>
+        </p:spPr>
+        <p:style>
+          <a:lnRef idx="2">
+            <a:schemeClr val="accent1"/>
+          </a:lnRef>
+          <a:fillRef idx="0">
+            <a:schemeClr val="accent1"/>
+          </a:fillRef>
+          <a:effectRef idx="1">
+            <a:schemeClr val="accent1"/>
+          </a:effectRef>
+          <a:fontRef idx="minor">
+            <a:schemeClr val="tx1"/>
+          </a:fontRef>
+        </p:style>
+      </p:cxnSp>
+      <p:sp>
+        <p:nvSpPr>
+          <p:cNvPr id="24" name="TextBox 23"/>
           <p:cNvSpPr txBox="1"/>
           <p:nvPr/>
         </p:nvSpPr>
         <p:spPr>
           <a:xfrm>
-            <a:off x="457200" y="6492240"/>
-            <a:ext cx="3657600" cy="274320"/>
+            <a:off x="5909776" y="2846504"/>
+            <a:ext cx="5486400" cy="237744"/>
           </a:xfrm>
           <a:prstGeom prst="rect">
             <a:avLst/>
@@ -4890,143 +5481,49 @@
           <a:noFill/>
         </p:spPr>
         <p:txBody>
-          <a:bodyPr wrap="square">
+          <a:bodyPr wrap="square" lIns="45720" rIns="45720">
             <a:spAutoFit/>
           </a:bodyPr>
           <a:lstStyle/>
           <a:p>
-            <a:pPr>
+            <a:pPr algn="r">
               <a:defRPr>
                 <a:latin typeface="Roboto"/>
               </a:defRPr>
             </a:pPr>
             <a:r>
-              <a:rPr sz="900" b="0">
+              <a:rPr sz="1000" b="1">
                 <a:solidFill>
-                  <a:srgbClr val="5F6F63"/>
+                  <a:srgbClr val="25342A"/>
                 </a:solidFill>
                 <a:latin typeface="Roboto"/>
               </a:rPr>
-              <a:t>runway.pptx</a:t>
-            </a:r>
-          </a:p>
-        </p:txBody>
-      </p:sp>
-      <p:sp>
-        <p:nvSpPr>
-          <p:cNvPr id="22" name="TextBox 21"/>
-          <p:cNvSpPr txBox="1"/>
-          <p:nvPr/>
-        </p:nvSpPr>
-        <p:spPr>
-          <a:xfrm>
-            <a:off x="4297680" y="6492240"/>
-            <a:ext cx="3657600" cy="274320"/>
-          </a:xfrm>
-          <a:prstGeom prst="rect">
-            <a:avLst/>
-          </a:prstGeom>
-          <a:noFill/>
-        </p:spPr>
-        <p:txBody>
-          <a:bodyPr wrap="square">
-            <a:spAutoFit/>
-          </a:bodyPr>
-          <a:lstStyle/>
-          <a:p>
-            <a:pPr algn="ctr">
-              <a:defRPr>
-                <a:latin typeface="Roboto"/>
-              </a:defRPr>
-            </a:pPr>
-            <a:r>
-              <a:rPr sz="900" b="0">
-                <a:solidFill>
-                  <a:srgbClr val="5F6F63"/>
-                </a:solidFill>
-                <a:latin typeface="Roboto"/>
-              </a:rPr>
-              <a:t>Data retrieved 2pm, Tue 6 Oct 2026 · Sample data</a:t>
-            </a:r>
-          </a:p>
-        </p:txBody>
-      </p:sp>
-      <p:sp>
-        <p:nvSpPr>
-          <p:cNvPr id="23" name="TextBox 22"/>
-          <p:cNvSpPr txBox="1"/>
-          <p:nvPr/>
-        </p:nvSpPr>
-        <p:spPr>
-          <a:xfrm>
-            <a:off x="8503920" y="6492240"/>
-            <a:ext cx="3200400" cy="274320"/>
-          </a:xfrm>
-          <a:prstGeom prst="rect">
-            <a:avLst/>
-          </a:prstGeom>
-          <a:noFill/>
-        </p:spPr>
-        <p:txBody>
-          <a:bodyPr wrap="square">
-            <a:spAutoFit/>
-          </a:bodyPr>
-          <a:lstStyle/>
-          <a:p>
-            <a:pPr algn="r">
-              <a:defRPr>
-                <a:latin typeface="Roboto"/>
-              </a:defRPr>
-            </a:pPr>
-            <a:r>
-              <a:rPr sz="900" b="0">
-                <a:solidFill>
-                  <a:srgbClr val="5F6F63"/>
-                </a:solidFill>
-                <a:latin typeface="Roboto"/>
-              </a:rPr>
-              <a:t>Slide 2 of 4</a:t>
-            </a:r>
-          </a:p>
-        </p:txBody>
-      </p:sp>
-    </p:spTree>
-  </p:cSld>
-  <p:clrMapOvr>
-    <a:masterClrMapping/>
-  </p:clrMapOvr>
-</p:sld>
-</file>
-
-<file path=ppt/slides/slide3.xml><?xml version="1.0" encoding="utf-8"?>
-<p:sld xmlns:a="http://schemas.openxmlformats.org/drawingml/2006/main" xmlns:p="http://schemas.openxmlformats.org/presentationml/2006/main" xmlns:r="http://schemas.openxmlformats.org/officeDocument/2006/relationships">
-  <p:cSld>
-    <p:spTree>
-      <p:nvGrpSpPr>
-        <p:cNvPr id="1" name=""/>
-        <p:cNvGrpSpPr/>
-        <p:nvPr/>
-      </p:nvGrpSpPr>
-      <p:grpSpPr/>
-      <p:sp>
-        <p:nvSpPr>
-          <p:cNvPr id="2" name="Rectangle 1"/>
+              <a:t>Reserves target $644,800: 3.0 months of spending + unspent grant money</a:t>
+            </a:r>
+          </a:p>
+        </p:txBody>
+      </p:sp>
+      <p:sp>
+        <p:nvSpPr>
+          <p:cNvPr id="25" name="Rectangle 24"/>
           <p:cNvSpPr/>
           <p:nvPr/>
         </p:nvSpPr>
         <p:spPr>
           <a:xfrm>
-            <a:off x="0" y="0"/>
-            <a:ext cx="12191695" cy="73152"/>
+            <a:off x="457200" y="5212080"/>
+            <a:ext cx="5501487" cy="1097280"/>
           </a:xfrm>
           <a:prstGeom prst="rect">
             <a:avLst/>
           </a:prstGeom>
           <a:solidFill>
-            <a:srgbClr val="2F7A5D"/>
+            <a:srgbClr val="FFFFFF"/>
           </a:solidFill>
           <a:ln>
-            <a:noFill/>
+            <a:solidFill>
+              <a:srgbClr val="DCE8DC"/>
+            </a:solidFill>
           </a:ln>
         </p:spPr>
         <p:style>
@@ -5057,14 +5554,14 @@
       </p:sp>
       <p:sp>
         <p:nvSpPr>
-          <p:cNvPr id="3" name="TextBox 2"/>
+          <p:cNvPr id="26" name="TextBox 25"/>
           <p:cNvSpPr txBox="1"/>
           <p:nvPr/>
         </p:nvSpPr>
         <p:spPr>
           <a:xfrm>
-            <a:off x="457200" y="164592"/>
-            <a:ext cx="7315200" cy="274320"/>
+            <a:off x="594360" y="5266944"/>
+            <a:ext cx="5227167" cy="274320"/>
           </a:xfrm>
           <a:prstGeom prst="rect">
             <a:avLst/>
@@ -5072,7 +5569,7 @@
           <a:noFill/>
         </p:spPr>
         <p:txBody>
-          <a:bodyPr wrap="square">
+          <a:bodyPr wrap="square" lIns="45720" rIns="45720">
             <a:spAutoFit/>
           </a:bodyPr>
           <a:lstStyle/>
@@ -5083,27 +5580,27 @@
               </a:defRPr>
             </a:pPr>
             <a:r>
-              <a:rPr sz="1000" b="0">
+              <a:rPr sz="1000" b="1">
                 <a:solidFill>
                   <a:srgbClr val="5F6F63"/>
                 </a:solidFill>
                 <a:latin typeface="Roboto"/>
               </a:rPr>
-              <a:t>Sample Community Services Ltd · How many months of runway do we have?</a:t>
-            </a:r>
-          </a:p>
-        </p:txBody>
-      </p:sp>
-      <p:sp>
-        <p:nvSpPr>
-          <p:cNvPr id="4" name="TextBox 3"/>
+              <a:t>WHAT IT SHOWS</a:t>
+            </a:r>
+          </a:p>
+        </p:txBody>
+      </p:sp>
+      <p:sp>
+        <p:nvSpPr>
+          <p:cNvPr id="27" name="TextBox 26"/>
           <p:cNvSpPr txBox="1"/>
           <p:nvPr/>
         </p:nvSpPr>
         <p:spPr>
           <a:xfrm>
-            <a:off x="457200" y="411480"/>
-            <a:ext cx="11247120" cy="548640"/>
+            <a:off x="594360" y="5541264"/>
+            <a:ext cx="5227167" cy="731520"/>
           </a:xfrm>
           <a:prstGeom prst="rect">
             <a:avLst/>
@@ -5111,7 +5608,7 @@
           <a:noFill/>
         </p:spPr>
         <p:txBody>
-          <a:bodyPr wrap="square">
+          <a:bodyPr wrap="square" lIns="45720" rIns="45720">
             <a:spAutoFit/>
           </a:bodyPr>
           <a:lstStyle/>
@@ -5122,33 +5619,33 @@
               </a:defRPr>
             </a:pPr>
             <a:r>
-              <a:rPr sz="2400" b="1">
+              <a:rPr sz="1200" b="0">
                 <a:solidFill>
                   <a:srgbClr val="25342A"/>
                 </a:solidFill>
                 <a:latin typeface="Roboto"/>
               </a:rPr>
-              <a:t>What it shows</a:t>
-            </a:r>
-          </a:p>
-        </p:txBody>
-      </p:sp>
-      <p:sp>
-        <p:nvSpPr>
-          <p:cNvPr id="5" name="Rectangle 4"/>
+              <a:t>Unrestricted cash ($324,680, after setting aside unspent grant money) would cover 2.0 months of spending at September's rate of spending, short of the 3.0 months target by $164,020.</a:t>
+            </a:r>
+          </a:p>
+        </p:txBody>
+      </p:sp>
+      <p:sp>
+        <p:nvSpPr>
+          <p:cNvPr id="28" name="Rectangle 27"/>
           <p:cNvSpPr/>
           <p:nvPr/>
         </p:nvSpPr>
         <p:spPr>
           <a:xfrm>
-            <a:off x="457200" y="1554480"/>
-            <a:ext cx="5501487" cy="4389120"/>
+            <a:off x="6233007" y="5212080"/>
+            <a:ext cx="5501487" cy="1097280"/>
           </a:xfrm>
           <a:prstGeom prst="rect">
             <a:avLst/>
           </a:prstGeom>
           <a:solidFill>
-            <a:srgbClr val="FFFFFF"/>
+            <a:srgbClr val="EEF5F0"/>
           </a:solidFill>
           <a:ln>
             <a:solidFill>
@@ -5184,14 +5681,14 @@
       </p:sp>
       <p:sp>
         <p:nvSpPr>
-          <p:cNvPr id="6" name="TextBox 5"/>
+          <p:cNvPr id="29" name="TextBox 28"/>
           <p:cNvSpPr txBox="1"/>
           <p:nvPr/>
         </p:nvSpPr>
         <p:spPr>
           <a:xfrm>
-            <a:off x="685800" y="1691640"/>
-            <a:ext cx="5044287" cy="365760"/>
+            <a:off x="6370167" y="5266944"/>
+            <a:ext cx="5227167" cy="274320"/>
           </a:xfrm>
           <a:prstGeom prst="rect">
             <a:avLst/>
@@ -5199,7 +5696,7 @@
           <a:noFill/>
         </p:spPr>
         <p:txBody>
-          <a:bodyPr wrap="square">
+          <a:bodyPr wrap="square" lIns="45720" rIns="45720">
             <a:spAutoFit/>
           </a:bodyPr>
           <a:lstStyle/>
@@ -5210,27 +5707,27 @@
               </a:defRPr>
             </a:pPr>
             <a:r>
-              <a:rPr sz="1100" b="1">
+              <a:rPr sz="1000" b="1">
                 <a:solidFill>
                   <a:srgbClr val="5F6F63"/>
                 </a:solidFill>
                 <a:latin typeface="Roboto"/>
               </a:rPr>
-              <a:t>WHAT IT SHOWS</a:t>
-            </a:r>
-          </a:p>
-        </p:txBody>
-      </p:sp>
-      <p:sp>
-        <p:nvSpPr>
-          <p:cNvPr id="7" name="TextBox 6"/>
+              <a:t>WHAT YOU'D DO ABOUT IT</a:t>
+            </a:r>
+          </a:p>
+        </p:txBody>
+      </p:sp>
+      <p:sp>
+        <p:nvSpPr>
+          <p:cNvPr id="30" name="TextBox 29"/>
           <p:cNvSpPr txBox="1"/>
           <p:nvPr/>
         </p:nvSpPr>
         <p:spPr>
           <a:xfrm>
-            <a:off x="685800" y="2103120"/>
-            <a:ext cx="5044287" cy="3749039"/>
+            <a:off x="6370167" y="5541264"/>
+            <a:ext cx="5227167" cy="731520"/>
           </a:xfrm>
           <a:prstGeom prst="rect">
             <a:avLst/>
@@ -5238,7 +5735,7 @@
           <a:noFill/>
         </p:spPr>
         <p:txBody>
-          <a:bodyPr wrap="square">
+          <a:bodyPr wrap="square" lIns="45720" rIns="45720">
             <a:spAutoFit/>
           </a:bodyPr>
           <a:lstStyle/>
@@ -5249,76 +5746,27 @@
               </a:defRPr>
             </a:pPr>
             <a:r>
-              <a:rPr sz="1600" b="0">
+              <a:rPr sz="1200" b="0">
                 <a:solidFill>
                   <a:srgbClr val="25342A"/>
                 </a:solidFill>
                 <a:latin typeface="Roboto"/>
               </a:rPr>
-              <a:t>Unrestricted cash ($324,680, after setting aside unspent grant money) would cover 2.0 months of spending at September's rate of spending, short of the 3.0 months target by $164,020.</a:t>
-            </a:r>
-          </a:p>
-        </p:txBody>
-      </p:sp>
-      <p:sp>
-        <p:nvSpPr>
-          <p:cNvPr id="8" name="Rectangle 7"/>
-          <p:cNvSpPr/>
-          <p:nvPr/>
-        </p:nvSpPr>
-        <p:spPr>
-          <a:xfrm>
-            <a:off x="6233007" y="1554480"/>
-            <a:ext cx="5501487" cy="4389120"/>
-          </a:xfrm>
-          <a:prstGeom prst="rect">
-            <a:avLst/>
-          </a:prstGeom>
-          <a:solidFill>
-            <a:srgbClr val="EEF5F0"/>
-          </a:solidFill>
-          <a:ln>
-            <a:solidFill>
-              <a:srgbClr val="DCE8DC"/>
-            </a:solidFill>
-          </a:ln>
-        </p:spPr>
-        <p:style>
-          <a:lnRef idx="1">
-            <a:schemeClr val="accent1"/>
-          </a:lnRef>
-          <a:fillRef idx="3">
-            <a:schemeClr val="accent1"/>
-          </a:fillRef>
-          <a:effectRef idx="2">
-            <a:schemeClr val="accent1"/>
-          </a:effectRef>
-          <a:fontRef idx="minor">
-            <a:schemeClr val="lt1"/>
-          </a:fontRef>
-        </p:style>
-        <p:txBody>
-          <a:bodyPr rtlCol="0" anchor="ctr"/>
-          <a:lstStyle/>
-          <a:p>
-            <a:pPr algn="ctr">
-              <a:defRPr>
-                <a:latin typeface="Roboto"/>
-              </a:defRPr>
-            </a:pPr>
-          </a:p>
-        </p:txBody>
-      </p:sp>
-      <p:sp>
-        <p:nvSpPr>
-          <p:cNvPr id="9" name="TextBox 8"/>
+              <a:t>A reserves plan is the usual next step: how much of each month's surplus goes to reserves, and by when the gap is closed.</a:t>
+            </a:r>
+          </a:p>
+        </p:txBody>
+      </p:sp>
+      <p:sp>
+        <p:nvSpPr>
+          <p:cNvPr id="31" name="TextBox 30"/>
           <p:cNvSpPr txBox="1"/>
           <p:nvPr/>
         </p:nvSpPr>
         <p:spPr>
           <a:xfrm>
-            <a:off x="6461607" y="1691640"/>
-            <a:ext cx="5044287" cy="365760"/>
+            <a:off x="457200" y="6492240"/>
+            <a:ext cx="2926080" cy="274320"/>
           </a:xfrm>
           <a:prstGeom prst="rect">
             <a:avLst/>
@@ -5326,7 +5774,7 @@
           <a:noFill/>
         </p:spPr>
         <p:txBody>
-          <a:bodyPr wrap="square">
+          <a:bodyPr wrap="square" lIns="45720" rIns="45720">
             <a:spAutoFit/>
           </a:bodyPr>
           <a:lstStyle/>
@@ -5337,27 +5785,27 @@
               </a:defRPr>
             </a:pPr>
             <a:r>
-              <a:rPr sz="1100" b="1">
+              <a:rPr sz="900" b="0">
                 <a:solidFill>
                   <a:srgbClr val="5F6F63"/>
                 </a:solidFill>
                 <a:latin typeface="Roboto"/>
               </a:rPr>
-              <a:t>WHAT YOU'D DO ABOUT IT</a:t>
-            </a:r>
-          </a:p>
-        </p:txBody>
-      </p:sp>
-      <p:sp>
-        <p:nvSpPr>
-          <p:cNvPr id="10" name="TextBox 9"/>
+              <a:t>runway.pptx</a:t>
+            </a:r>
+          </a:p>
+        </p:txBody>
+      </p:sp>
+      <p:sp>
+        <p:nvSpPr>
+          <p:cNvPr id="32" name="TextBox 31"/>
           <p:cNvSpPr txBox="1"/>
           <p:nvPr/>
         </p:nvSpPr>
         <p:spPr>
           <a:xfrm>
-            <a:off x="6461607" y="2103120"/>
-            <a:ext cx="5044287" cy="3749039"/>
+            <a:off x="3108960" y="6492240"/>
+            <a:ext cx="5943600" cy="274320"/>
           </a:xfrm>
           <a:prstGeom prst="rect">
             <a:avLst/>
@@ -5365,38 +5813,38 @@
           <a:noFill/>
         </p:spPr>
         <p:txBody>
-          <a:bodyPr wrap="square">
+          <a:bodyPr wrap="square" lIns="45720" rIns="45720">
             <a:spAutoFit/>
           </a:bodyPr>
           <a:lstStyle/>
           <a:p>
-            <a:pPr>
+            <a:pPr algn="ctr">
               <a:defRPr>
                 <a:latin typeface="Roboto"/>
               </a:defRPr>
             </a:pPr>
             <a:r>
-              <a:rPr sz="1600" b="0">
+              <a:rPr sz="900" b="0">
                 <a:solidFill>
-                  <a:srgbClr val="25342A"/>
+                  <a:srgbClr val="5F6F63"/>
                 </a:solidFill>
                 <a:latin typeface="Roboto"/>
               </a:rPr>
-              <a:t>A reserves plan is the usual next step: how much of each month's surplus goes to reserves, and by when the gap is closed.</a:t>
-            </a:r>
-          </a:p>
-        </p:txBody>
-      </p:sp>
-      <p:sp>
-        <p:nvSpPr>
-          <p:cNvPr id="11" name="TextBox 10"/>
+              <a:t>Data retrieved 2pm, Tue 6 Oct 2026 · Generated 8 Oct 2026, 9:35am · Sample data · Made with Python (python-pptx)</a:t>
+            </a:r>
+          </a:p>
+        </p:txBody>
+      </p:sp>
+      <p:sp>
+        <p:nvSpPr>
+          <p:cNvPr id="33" name="TextBox 32"/>
           <p:cNvSpPr txBox="1"/>
           <p:nvPr/>
         </p:nvSpPr>
         <p:spPr>
           <a:xfrm>
-            <a:off x="457200" y="6492240"/>
-            <a:ext cx="3657600" cy="274320"/>
+            <a:off x="8503920" y="6492240"/>
+            <a:ext cx="3200400" cy="274320"/>
           </a:xfrm>
           <a:prstGeom prst="rect">
             <a:avLst/>
@@ -5404,12 +5852,12 @@
           <a:noFill/>
         </p:spPr>
         <p:txBody>
-          <a:bodyPr wrap="square">
+          <a:bodyPr wrap="square" lIns="45720" rIns="45720">
             <a:spAutoFit/>
           </a:bodyPr>
           <a:lstStyle/>
           <a:p>
-            <a:pPr>
+            <a:pPr algn="r">
               <a:defRPr>
                 <a:latin typeface="Roboto"/>
               </a:defRPr>
@@ -5421,402 +5869,7 @@
                 </a:solidFill>
                 <a:latin typeface="Roboto"/>
               </a:rPr>
-              <a:t>runway.pptx</a:t>
-            </a:r>
-          </a:p>
-        </p:txBody>
-      </p:sp>
-      <p:sp>
-        <p:nvSpPr>
-          <p:cNvPr id="12" name="TextBox 11"/>
-          <p:cNvSpPr txBox="1"/>
-          <p:nvPr/>
-        </p:nvSpPr>
-        <p:spPr>
-          <a:xfrm>
-            <a:off x="4297680" y="6492240"/>
-            <a:ext cx="3657600" cy="274320"/>
-          </a:xfrm>
-          <a:prstGeom prst="rect">
-            <a:avLst/>
-          </a:prstGeom>
-          <a:noFill/>
-        </p:spPr>
-        <p:txBody>
-          <a:bodyPr wrap="square">
-            <a:spAutoFit/>
-          </a:bodyPr>
-          <a:lstStyle/>
-          <a:p>
-            <a:pPr algn="ctr">
-              <a:defRPr>
-                <a:latin typeface="Roboto"/>
-              </a:defRPr>
-            </a:pPr>
-            <a:r>
-              <a:rPr sz="900" b="0">
-                <a:solidFill>
-                  <a:srgbClr val="5F6F63"/>
-                </a:solidFill>
-                <a:latin typeface="Roboto"/>
-              </a:rPr>
-              <a:t>Data retrieved 2pm, Tue 6 Oct 2026 · Sample data</a:t>
-            </a:r>
-          </a:p>
-        </p:txBody>
-      </p:sp>
-      <p:sp>
-        <p:nvSpPr>
-          <p:cNvPr id="13" name="TextBox 12"/>
-          <p:cNvSpPr txBox="1"/>
-          <p:nvPr/>
-        </p:nvSpPr>
-        <p:spPr>
-          <a:xfrm>
-            <a:off x="8503920" y="6492240"/>
-            <a:ext cx="3200400" cy="274320"/>
-          </a:xfrm>
-          <a:prstGeom prst="rect">
-            <a:avLst/>
-          </a:prstGeom>
-          <a:noFill/>
-        </p:spPr>
-        <p:txBody>
-          <a:bodyPr wrap="square">
-            <a:spAutoFit/>
-          </a:bodyPr>
-          <a:lstStyle/>
-          <a:p>
-            <a:pPr algn="r">
-              <a:defRPr>
-                <a:latin typeface="Roboto"/>
-              </a:defRPr>
-            </a:pPr>
-            <a:r>
-              <a:rPr sz="900" b="0">
-                <a:solidFill>
-                  <a:srgbClr val="5F6F63"/>
-                </a:solidFill>
-                <a:latin typeface="Roboto"/>
-              </a:rPr>
-              <a:t>Slide 3 of 4</a:t>
-            </a:r>
-          </a:p>
-        </p:txBody>
-      </p:sp>
-    </p:spTree>
-  </p:cSld>
-  <p:clrMapOvr>
-    <a:masterClrMapping/>
-  </p:clrMapOvr>
-</p:sld>
-</file>
-
-<file path=ppt/slides/slide4.xml><?xml version="1.0" encoding="utf-8"?>
-<p:sld xmlns:a="http://schemas.openxmlformats.org/drawingml/2006/main" xmlns:p="http://schemas.openxmlformats.org/presentationml/2006/main" xmlns:r="http://schemas.openxmlformats.org/officeDocument/2006/relationships">
-  <p:cSld>
-    <p:spTree>
-      <p:nvGrpSpPr>
-        <p:cNvPr id="1" name=""/>
-        <p:cNvGrpSpPr/>
-        <p:nvPr/>
-      </p:nvGrpSpPr>
-      <p:grpSpPr/>
-      <p:sp>
-        <p:nvSpPr>
-          <p:cNvPr id="2" name="Rectangle 1"/>
-          <p:cNvSpPr/>
-          <p:nvPr/>
-        </p:nvSpPr>
-        <p:spPr>
-          <a:xfrm>
-            <a:off x="0" y="0"/>
-            <a:ext cx="12191695" cy="73152"/>
-          </a:xfrm>
-          <a:prstGeom prst="rect">
-            <a:avLst/>
-          </a:prstGeom>
-          <a:solidFill>
-            <a:srgbClr val="2F7A5D"/>
-          </a:solidFill>
-          <a:ln>
-            <a:noFill/>
-          </a:ln>
-        </p:spPr>
-        <p:style>
-          <a:lnRef idx="1">
-            <a:schemeClr val="accent1"/>
-          </a:lnRef>
-          <a:fillRef idx="3">
-            <a:schemeClr val="accent1"/>
-          </a:fillRef>
-          <a:effectRef idx="2">
-            <a:schemeClr val="accent1"/>
-          </a:effectRef>
-          <a:fontRef idx="minor">
-            <a:schemeClr val="lt1"/>
-          </a:fontRef>
-        </p:style>
-        <p:txBody>
-          <a:bodyPr rtlCol="0" anchor="ctr"/>
-          <a:lstStyle/>
-          <a:p>
-            <a:pPr algn="ctr">
-              <a:defRPr>
-                <a:latin typeface="Roboto"/>
-              </a:defRPr>
-            </a:pPr>
-          </a:p>
-        </p:txBody>
-      </p:sp>
-      <p:sp>
-        <p:nvSpPr>
-          <p:cNvPr id="3" name="TextBox 2"/>
-          <p:cNvSpPr txBox="1"/>
-          <p:nvPr/>
-        </p:nvSpPr>
-        <p:spPr>
-          <a:xfrm>
-            <a:off x="457200" y="164592"/>
-            <a:ext cx="7315200" cy="274320"/>
-          </a:xfrm>
-          <a:prstGeom prst="rect">
-            <a:avLst/>
-          </a:prstGeom>
-          <a:noFill/>
-        </p:spPr>
-        <p:txBody>
-          <a:bodyPr wrap="square">
-            <a:spAutoFit/>
-          </a:bodyPr>
-          <a:lstStyle/>
-          <a:p>
-            <a:pPr>
-              <a:defRPr>
-                <a:latin typeface="Roboto"/>
-              </a:defRPr>
-            </a:pPr>
-            <a:r>
-              <a:rPr sz="1000" b="0">
-                <a:solidFill>
-                  <a:srgbClr val="5F6F63"/>
-                </a:solidFill>
-                <a:latin typeface="Roboto"/>
-              </a:rPr>
-              <a:t>Sample Community Services Ltd · How many months of runway do we have?</a:t>
-            </a:r>
-          </a:p>
-        </p:txBody>
-      </p:sp>
-      <p:sp>
-        <p:nvSpPr>
-          <p:cNvPr id="4" name="TextBox 3"/>
-          <p:cNvSpPr txBox="1"/>
-          <p:nvPr/>
-        </p:nvSpPr>
-        <p:spPr>
-          <a:xfrm>
-            <a:off x="457200" y="411480"/>
-            <a:ext cx="11247120" cy="548640"/>
-          </a:xfrm>
-          <a:prstGeom prst="rect">
-            <a:avLst/>
-          </a:prstGeom>
-          <a:noFill/>
-        </p:spPr>
-        <p:txBody>
-          <a:bodyPr wrap="square">
-            <a:spAutoFit/>
-          </a:bodyPr>
-          <a:lstStyle/>
-          <a:p>
-            <a:pPr>
-              <a:defRPr>
-                <a:latin typeface="Roboto"/>
-              </a:defRPr>
-            </a:pPr>
-            <a:r>
-              <a:rPr sz="2400" b="1">
-                <a:solidFill>
-                  <a:srgbClr val="25342A"/>
-                </a:solidFill>
-                <a:latin typeface="Roboto"/>
-              </a:rPr>
-              <a:t>Cash at bank, every day (1 Aug to 30 Sep) · Cash at bank $</a:t>
-            </a:r>
-          </a:p>
-        </p:txBody>
-      </p:sp>
-      <p:sp>
-        <p:nvSpPr>
-          <p:cNvPr id="5" name="TextBox 4"/>
-          <p:cNvSpPr txBox="1"/>
-          <p:nvPr/>
-        </p:nvSpPr>
-        <p:spPr>
-          <a:xfrm>
-            <a:off x="457200" y="960120"/>
-            <a:ext cx="11247120" cy="457200"/>
-          </a:xfrm>
-          <a:prstGeom prst="rect">
-            <a:avLst/>
-          </a:prstGeom>
-          <a:noFill/>
-        </p:spPr>
-        <p:txBody>
-          <a:bodyPr wrap="square">
-            <a:spAutoFit/>
-          </a:bodyPr>
-          <a:lstStyle/>
-          <a:p>
-            <a:pPr>
-              <a:defRPr>
-                <a:latin typeface="Roboto"/>
-              </a:defRPr>
-            </a:pPr>
-            <a:r>
-              <a:rPr sz="1200" b="0">
-                <a:solidFill>
-                  <a:srgbClr val="5F6F63"/>
-                </a:solidFill>
-                <a:latin typeface="Roboto"/>
-              </a:rPr>
-              <a:t>Cash at bank includes unspent grant money. The daily cash data starts 1 August 2026 (after the opening balance).</a:t>
-            </a:r>
-          </a:p>
-        </p:txBody>
-      </p:sp>
-      <p:graphicFrame>
-        <p:nvGraphicFramePr>
-          <p:cNvPr id="6" name="Chart 5"/>
-          <p:cNvGraphicFramePr>
-            <a:graphicFrameLocks noGrp="1"/>
-          </p:cNvGraphicFramePr>
-          <p:nvPr/>
-        </p:nvGraphicFramePr>
-        <p:xfrm>
-          <a:off x="457200" y="1463040"/>
-          <a:ext cx="11247120" cy="4754880"/>
-        </p:xfrm>
-        <a:graphic>
-          <a:graphicData uri="http://schemas.openxmlformats.org/drawingml/2006/chart">
-            <c:chart xmlns:c="http://schemas.openxmlformats.org/drawingml/2006/chart" r:id="rId2"/>
-          </a:graphicData>
-        </a:graphic>
-      </p:graphicFrame>
-      <p:sp>
-        <p:nvSpPr>
-          <p:cNvPr id="7" name="TextBox 6"/>
-          <p:cNvSpPr txBox="1"/>
-          <p:nvPr/>
-        </p:nvSpPr>
-        <p:spPr>
-          <a:xfrm>
-            <a:off x="457200" y="6492240"/>
-            <a:ext cx="3657600" cy="274320"/>
-          </a:xfrm>
-          <a:prstGeom prst="rect">
-            <a:avLst/>
-          </a:prstGeom>
-          <a:noFill/>
-        </p:spPr>
-        <p:txBody>
-          <a:bodyPr wrap="square">
-            <a:spAutoFit/>
-          </a:bodyPr>
-          <a:lstStyle/>
-          <a:p>
-            <a:pPr>
-              <a:defRPr>
-                <a:latin typeface="Roboto"/>
-              </a:defRPr>
-            </a:pPr>
-            <a:r>
-              <a:rPr sz="900" b="0">
-                <a:solidFill>
-                  <a:srgbClr val="5F6F63"/>
-                </a:solidFill>
-                <a:latin typeface="Roboto"/>
-              </a:rPr>
-              <a:t>runway.pptx</a:t>
-            </a:r>
-          </a:p>
-        </p:txBody>
-      </p:sp>
-      <p:sp>
-        <p:nvSpPr>
-          <p:cNvPr id="8" name="TextBox 7"/>
-          <p:cNvSpPr txBox="1"/>
-          <p:nvPr/>
-        </p:nvSpPr>
-        <p:spPr>
-          <a:xfrm>
-            <a:off x="4297680" y="6492240"/>
-            <a:ext cx="3657600" cy="274320"/>
-          </a:xfrm>
-          <a:prstGeom prst="rect">
-            <a:avLst/>
-          </a:prstGeom>
-          <a:noFill/>
-        </p:spPr>
-        <p:txBody>
-          <a:bodyPr wrap="square">
-            <a:spAutoFit/>
-          </a:bodyPr>
-          <a:lstStyle/>
-          <a:p>
-            <a:pPr algn="ctr">
-              <a:defRPr>
-                <a:latin typeface="Roboto"/>
-              </a:defRPr>
-            </a:pPr>
-            <a:r>
-              <a:rPr sz="900" b="0">
-                <a:solidFill>
-                  <a:srgbClr val="5F6F63"/>
-                </a:solidFill>
-                <a:latin typeface="Roboto"/>
-              </a:rPr>
-              <a:t>Data retrieved 2pm, Tue 6 Oct 2026 · Sample data</a:t>
-            </a:r>
-          </a:p>
-        </p:txBody>
-      </p:sp>
-      <p:sp>
-        <p:nvSpPr>
-          <p:cNvPr id="9" name="TextBox 8"/>
-          <p:cNvSpPr txBox="1"/>
-          <p:nvPr/>
-        </p:nvSpPr>
-        <p:spPr>
-          <a:xfrm>
-            <a:off x="8503920" y="6492240"/>
-            <a:ext cx="3200400" cy="274320"/>
-          </a:xfrm>
-          <a:prstGeom prst="rect">
-            <a:avLst/>
-          </a:prstGeom>
-          <a:noFill/>
-        </p:spPr>
-        <p:txBody>
-          <a:bodyPr wrap="square">
-            <a:spAutoFit/>
-          </a:bodyPr>
-          <a:lstStyle/>
-          <a:p>
-            <a:pPr algn="r">
-              <a:defRPr>
-                <a:latin typeface="Roboto"/>
-              </a:defRPr>
-            </a:pPr>
-            <a:r>
-              <a:rPr sz="900" b="0">
-                <a:solidFill>
-                  <a:srgbClr val="5F6F63"/>
-                </a:solidFill>
-                <a:latin typeface="Roboto"/>
-              </a:rPr>
-              <a:t>Slide 4 of 4</a:t>
+              <a:t>Slide 2 of 2</a:t>
             </a:r>
           </a:p>
         </p:txBody>
@@ -5830,6 +5883,326 @@
 </file>
 
 <file path=ppt/theme/theme1.xml><?xml version="1.0" encoding="utf-8"?>
+<a:theme xmlns:a="http://schemas.openxmlformats.org/drawingml/2006/main" name="Office Theme">
+  <a:themeElements>
+    <a:clrScheme name="Office">
+      <a:dk1>
+        <a:sysClr val="windowText" lastClr="000000"/>
+      </a:dk1>
+      <a:lt1>
+        <a:sysClr val="window" lastClr="FFFFFF"/>
+      </a:lt1>
+      <a:dk2>
+        <a:srgbClr val="25342A"/>
+      </a:dk2>
+      <a:lt2>
+        <a:srgbClr val="F4F7F2"/>
+      </a:lt2>
+      <a:accent1>
+        <a:srgbClr val="2F7A5D"/>
+      </a:accent1>
+      <a:accent2>
+        <a:srgbClr val="0E9F6E"/>
+      </a:accent2>
+      <a:accent3>
+        <a:srgbClr val="7D8790"/>
+      </a:accent3>
+      <a:accent4>
+        <a:srgbClr val="8A6D3B"/>
+      </a:accent4>
+      <a:accent5>
+        <a:srgbClr val="B42318"/>
+      </a:accent5>
+      <a:accent6>
+        <a:srgbClr val="8E9CAB"/>
+      </a:accent6>
+      <a:hlink>
+        <a:srgbClr val="0000FF"/>
+      </a:hlink>
+      <a:folHlink>
+        <a:srgbClr val="800080"/>
+      </a:folHlink>
+    </a:clrScheme>
+    <a:fontScheme name="Office">
+      <a:majorFont>
+        <a:latin typeface="Roboto"/>
+        <a:ea typeface=""/>
+        <a:cs typeface=""/>
+        <a:font script="Jpan" typeface="ＭＳ Ｐゴシック"/>
+        <a:font script="Hang" typeface="맑은 고딕"/>
+        <a:font script="Hans" typeface="宋体"/>
+        <a:font script="Hant" typeface="新細明體"/>
+        <a:font script="Arab" typeface="Times New Roman"/>
+        <a:font script="Hebr" typeface="Times New Roman"/>
+        <a:font script="Thai" typeface="Angsana New"/>
+        <a:font script="Ethi" typeface="Nyala"/>
+        <a:font script="Beng" typeface="Vrinda"/>
+        <a:font script="Gujr" typeface="Shruti"/>
+        <a:font script="Khmr" typeface="MoolBoran"/>
+        <a:font script="Knda" typeface="Tunga"/>
+        <a:font script="Guru" typeface="Raavi"/>
+        <a:font script="Cans" typeface="Euphemia"/>
+        <a:font script="Cher" typeface="Plantagenet Cherokee"/>
+        <a:font script="Yiii" typeface="Microsoft Yi Baiti"/>
+        <a:font script="Tibt" typeface="Microsoft Himalaya"/>
+        <a:font script="Thaa" typeface="MV Boli"/>
+        <a:font script="Deva" typeface="Mangal"/>
+        <a:font script="Telu" typeface="Gautami"/>
+        <a:font script="Taml" typeface="Latha"/>
+        <a:font script="Syrc" typeface="Estrangelo Edessa"/>
+        <a:font script="Orya" typeface="Kalinga"/>
+        <a:font script="Mlym" typeface="Kartika"/>
+        <a:font script="Laoo" typeface="DokChampa"/>
+        <a:font script="Sinh" typeface="Iskoola Pota"/>
+        <a:font script="Mong" typeface="Mongolian Baiti"/>
+        <a:font script="Viet" typeface="Times New Roman"/>
+        <a:font script="Uigh" typeface="Microsoft Uighur"/>
+        <a:font script="Geor" typeface="Sylfaen"/>
+      </a:majorFont>
+      <a:minorFont>
+        <a:latin typeface="Roboto"/>
+        <a:ea typeface=""/>
+        <a:cs typeface=""/>
+        <a:font script="Jpan" typeface="ＭＳ Ｐゴシック"/>
+        <a:font script="Hang" typeface="맑은 고딕"/>
+        <a:font script="Hans" typeface="宋体"/>
+        <a:font script="Hant" typeface="新細明體"/>
+        <a:font script="Arab" typeface="Arial"/>
+        <a:font script="Hebr" typeface="Arial"/>
+        <a:font script="Thai" typeface="Cordia New"/>
+        <a:font script="Ethi" typeface="Nyala"/>
+        <a:font script="Beng" typeface="Vrinda"/>
+        <a:font script="Gujr" typeface="Shruti"/>
+        <a:font script="Khmr" typeface="DaunPenh"/>
+        <a:font script="Knda" typeface="Tunga"/>
+        <a:font script="Guru" typeface="Raavi"/>
+        <a:font script="Cans" typeface="Euphemia"/>
+        <a:font script="Cher" typeface="Plantagenet Cherokee"/>
+        <a:font script="Yiii" typeface="Microsoft Yi Baiti"/>
+        <a:font script="Tibt" typeface="Microsoft Himalaya"/>
+        <a:font script="Thaa" typeface="MV Boli"/>
+        <a:font script="Deva" typeface="Mangal"/>
+        <a:font script="Telu" typeface="Gautami"/>
+        <a:font script="Taml" typeface="Latha"/>
+        <a:font script="Syrc" typeface="Estrangelo Edessa"/>
+        <a:font script="Orya" typeface="Kalinga"/>
+        <a:font script="Mlym" typeface="Kartika"/>
+        <a:font script="Laoo" typeface="DokChampa"/>
+        <a:font script="Sinh" typeface="Iskoola Pota"/>
+        <a:font script="Mong" typeface="Mongolian Baiti"/>
+        <a:font script="Viet" typeface="Arial"/>
+        <a:font script="Uigh" typeface="Microsoft Uighur"/>
+        <a:font script="Geor" typeface="Sylfaen"/>
+      </a:minorFont>
+    </a:fontScheme>
+    <a:fmtScheme name="Office">
+      <a:fillStyleLst>
+        <a:solidFill>
+          <a:schemeClr val="phClr"/>
+        </a:solidFill>
+        <a:gradFill rotWithShape="1">
+          <a:gsLst>
+            <a:gs pos="0">
+              <a:schemeClr val="phClr">
+                <a:tint val="50000"/>
+                <a:satMod val="300000"/>
+              </a:schemeClr>
+            </a:gs>
+            <a:gs pos="35000">
+              <a:schemeClr val="phClr">
+                <a:tint val="37000"/>
+                <a:satMod val="300000"/>
+              </a:schemeClr>
+            </a:gs>
+            <a:gs pos="100000">
+              <a:schemeClr val="phClr">
+                <a:tint val="15000"/>
+                <a:satMod val="350000"/>
+              </a:schemeClr>
+            </a:gs>
+          </a:gsLst>
+          <a:lin ang="16200000" scaled="1"/>
+        </a:gradFill>
+        <a:gradFill rotWithShape="1">
+          <a:gsLst>
+            <a:gs pos="0">
+              <a:schemeClr val="phClr">
+                <a:tint val="100000"/>
+                <a:shade val="100000"/>
+                <a:satMod val="130000"/>
+              </a:schemeClr>
+            </a:gs>
+            <a:gs pos="100000">
+              <a:schemeClr val="phClr">
+                <a:tint val="50000"/>
+                <a:shade val="100000"/>
+                <a:satMod val="350000"/>
+              </a:schemeClr>
+            </a:gs>
+          </a:gsLst>
+          <a:lin ang="16200000" scaled="0"/>
+        </a:gradFill>
+      </a:fillStyleLst>
+      <a:lnStyleLst>
+        <a:ln w="9525" cap="flat" cmpd="sng" algn="ctr">
+          <a:solidFill>
+            <a:schemeClr val="phClr">
+              <a:shade val="95000"/>
+              <a:satMod val="105000"/>
+            </a:schemeClr>
+          </a:solidFill>
+          <a:prstDash val="solid"/>
+        </a:ln>
+        <a:ln w="25400" cap="flat" cmpd="sng" algn="ctr">
+          <a:solidFill>
+            <a:schemeClr val="phClr"/>
+          </a:solidFill>
+          <a:prstDash val="solid"/>
+        </a:ln>
+        <a:ln w="38100" cap="flat" cmpd="sng" algn="ctr">
+          <a:solidFill>
+            <a:schemeClr val="phClr"/>
+          </a:solidFill>
+          <a:prstDash val="solid"/>
+        </a:ln>
+      </a:lnStyleLst>
+      <a:effectStyleLst>
+        <a:effectStyle>
+          <a:effectLst>
+            <a:outerShdw blurRad="40000" dist="20000" dir="5400000" rotWithShape="0">
+              <a:srgbClr val="000000">
+                <a:alpha val="38000"/>
+              </a:srgbClr>
+            </a:outerShdw>
+          </a:effectLst>
+        </a:effectStyle>
+        <a:effectStyle>
+          <a:effectLst>
+            <a:outerShdw blurRad="40000" dist="23000" dir="5400000" rotWithShape="0">
+              <a:srgbClr val="000000">
+                <a:alpha val="35000"/>
+              </a:srgbClr>
+            </a:outerShdw>
+          </a:effectLst>
+        </a:effectStyle>
+        <a:effectStyle>
+          <a:effectLst>
+            <a:outerShdw blurRad="40000" dist="23000" dir="5400000" rotWithShape="0">
+              <a:srgbClr val="000000">
+                <a:alpha val="35000"/>
+              </a:srgbClr>
+            </a:outerShdw>
+          </a:effectLst>
+          <a:scene3d>
+            <a:camera prst="orthographicFront">
+              <a:rot lat="0" lon="0" rev="0"/>
+            </a:camera>
+            <a:lightRig rig="threePt" dir="t">
+              <a:rot lat="0" lon="0" rev="1200000"/>
+            </a:lightRig>
+          </a:scene3d>
+          <a:sp3d>
+            <a:bevelT w="63500" h="25400"/>
+          </a:sp3d>
+        </a:effectStyle>
+      </a:effectStyleLst>
+      <a:bgFillStyleLst>
+        <a:solidFill>
+          <a:schemeClr val="phClr"/>
+        </a:solidFill>
+        <a:gradFill rotWithShape="1">
+          <a:gsLst>
+            <a:gs pos="0">
+              <a:schemeClr val="phClr">
+                <a:tint val="40000"/>
+                <a:satMod val="350000"/>
+              </a:schemeClr>
+            </a:gs>
+            <a:gs pos="40000">
+              <a:schemeClr val="phClr">
+                <a:tint val="45000"/>
+                <a:shade val="99000"/>
+                <a:satMod val="350000"/>
+              </a:schemeClr>
+            </a:gs>
+            <a:gs pos="100000">
+              <a:schemeClr val="phClr">
+                <a:shade val="20000"/>
+                <a:satMod val="255000"/>
+              </a:schemeClr>
+            </a:gs>
+          </a:gsLst>
+          <a:path path="circle">
+            <a:fillToRect l="50000" t="-80000" r="50000" b="180000"/>
+          </a:path>
+        </a:gradFill>
+        <a:gradFill rotWithShape="1">
+          <a:gsLst>
+            <a:gs pos="0">
+              <a:schemeClr val="phClr">
+                <a:tint val="80000"/>
+                <a:satMod val="300000"/>
+              </a:schemeClr>
+            </a:gs>
+            <a:gs pos="100000">
+              <a:schemeClr val="phClr">
+                <a:shade val="30000"/>
+                <a:satMod val="200000"/>
+              </a:schemeClr>
+            </a:gs>
+          </a:gsLst>
+          <a:path path="circle">
+            <a:fillToRect l="50000" t="50000" r="50000" b="50000"/>
+          </a:path>
+        </a:gradFill>
+      </a:bgFillStyleLst>
+    </a:fmtScheme>
+  </a:themeElements>
+  <a:objectDefaults>
+    <a:spDef>
+      <a:spPr/>
+      <a:bodyPr/>
+      <a:lstStyle/>
+      <a:style>
+        <a:lnRef idx="1">
+          <a:schemeClr val="accent1"/>
+        </a:lnRef>
+        <a:fillRef idx="3">
+          <a:schemeClr val="accent1"/>
+        </a:fillRef>
+        <a:effectRef idx="2">
+          <a:schemeClr val="accent1"/>
+        </a:effectRef>
+        <a:fontRef idx="minor">
+          <a:schemeClr val="lt1"/>
+        </a:fontRef>
+      </a:style>
+    </a:spDef>
+    <a:lnDef>
+      <a:spPr/>
+      <a:bodyPr/>
+      <a:lstStyle/>
+      <a:style>
+        <a:lnRef idx="2">
+          <a:schemeClr val="accent1"/>
+        </a:lnRef>
+        <a:fillRef idx="0">
+          <a:schemeClr val="accent1"/>
+        </a:fillRef>
+        <a:effectRef idx="1">
+          <a:schemeClr val="accent1"/>
+        </a:effectRef>
+        <a:fontRef idx="minor">
+          <a:schemeClr val="tx1"/>
+        </a:fontRef>
+      </a:style>
+    </a:lnDef>
+  </a:objectDefaults>
+  <a:extraClrSchemeLst/>
+</a:theme>
+</file>
+
+<file path=ppt/theme/theme2.xml><?xml version="1.0" encoding="utf-8"?>
 <a:theme xmlns:a="http://schemas.openxmlformats.org/drawingml/2006/main" name="Office Theme">
   <a:themeElements>
     <a:clrScheme name="Office">

--- a/media/exports/reports/2026-09/runway.pptx
+++ b/media/exports/reports/2026-09/runway.pptx
@@ -353,187 +353,187 @@
                 <c:formatCode>$#,##0;[Red]($#,##0);"-"</c:formatCode>
                 <c:ptCount val="61"/>
                 <c:pt idx="0">
-                  <c:v>610594</c:v>
+                  <c:v>610000</c:v>
                 </c:pt>
                 <c:pt idx="1">
-                  <c:v>611188</c:v>
+                  <c:v>610000</c:v>
                 </c:pt>
                 <c:pt idx="2">
-                  <c:v>613087</c:v>
+                  <c:v>612356</c:v>
                 </c:pt>
                 <c:pt idx="3">
-                  <c:v>614986</c:v>
+                  <c:v>614712</c:v>
                 </c:pt>
                 <c:pt idx="4">
-                  <c:v>616885</c:v>
+                  <c:v>617068</c:v>
                 </c:pt>
                 <c:pt idx="5">
-                  <c:v>571896</c:v>
+                  <c:v>582091</c:v>
                 </c:pt>
                 <c:pt idx="6">
-                  <c:v>573795</c:v>
+                  <c:v>584447</c:v>
                 </c:pt>
                 <c:pt idx="7">
-                  <c:v>574389</c:v>
+                  <c:v>584447</c:v>
                 </c:pt>
                 <c:pt idx="8">
-                  <c:v>574983</c:v>
+                  <c:v>584447</c:v>
                 </c:pt>
                 <c:pt idx="9">
-                  <c:v>576882</c:v>
+                  <c:v>586803</c:v>
                 </c:pt>
                 <c:pt idx="10">
-                  <c:v>578781</c:v>
+                  <c:v>589159</c:v>
                 </c:pt>
                 <c:pt idx="11">
-                  <c:v>579375</c:v>
+                  <c:v>589159</c:v>
                 </c:pt>
                 <c:pt idx="12">
-                  <c:v>581274</c:v>
+                  <c:v>591515</c:v>
                 </c:pt>
                 <c:pt idx="13">
-                  <c:v>583173</c:v>
+                  <c:v>593871</c:v>
                 </c:pt>
                 <c:pt idx="14">
-                  <c:v>583767</c:v>
+                  <c:v>593871</c:v>
                 </c:pt>
                 <c:pt idx="15">
-                  <c:v>584361</c:v>
+                  <c:v>593871</c:v>
                 </c:pt>
                 <c:pt idx="16">
-                  <c:v>568010</c:v>
+                  <c:v>577977</c:v>
                 </c:pt>
                 <c:pt idx="17">
-                  <c:v>569908</c:v>
+                  <c:v>580332</c:v>
                 </c:pt>
                 <c:pt idx="18">
-                  <c:v>571806</c:v>
+                  <c:v>582687</c:v>
                 </c:pt>
                 <c:pt idx="19">
-                  <c:v>526817</c:v>
+                  <c:v>547709</c:v>
                 </c:pt>
                 <c:pt idx="20">
-                  <c:v>528715</c:v>
+                  <c:v>550064</c:v>
                 </c:pt>
                 <c:pt idx="21">
-                  <c:v>529308</c:v>
+                  <c:v>550064</c:v>
                 </c:pt>
                 <c:pt idx="22">
-                  <c:v>529901</c:v>
+                  <c:v>550064</c:v>
                 </c:pt>
                 <c:pt idx="23">
-                  <c:v>531799</c:v>
+                  <c:v>552419</c:v>
                 </c:pt>
                 <c:pt idx="24">
-                  <c:v>533697</c:v>
+                  <c:v>554774</c:v>
                 </c:pt>
                 <c:pt idx="25">
-                  <c:v>535595</c:v>
+                  <c:v>557129</c:v>
                 </c:pt>
                 <c:pt idx="26">
-                  <c:v>537493</c:v>
+                  <c:v>559484</c:v>
                 </c:pt>
                 <c:pt idx="27">
-                  <c:v>539391</c:v>
+                  <c:v>561839</c:v>
                 </c:pt>
                 <c:pt idx="28">
-                  <c:v>539984</c:v>
+                  <c:v>561839</c:v>
                 </c:pt>
                 <c:pt idx="29">
-                  <c:v>540577</c:v>
+                  <c:v>561839</c:v>
                 </c:pt>
                 <c:pt idx="30">
-                  <c:v>525675</c:v>
+                  <c:v>547394</c:v>
                 </c:pt>
                 <c:pt idx="31">
-                  <c:v>527865</c:v>
+                  <c:v>550048</c:v>
                 </c:pt>
                 <c:pt idx="32">
-                  <c:v>530055</c:v>
+                  <c:v>552702</c:v>
                 </c:pt>
                 <c:pt idx="33">
-                  <c:v>483769</c:v>
+                  <c:v>518023</c:v>
                 </c:pt>
                 <c:pt idx="34">
-                  <c:v>485958</c:v>
+                  <c:v>520677</c:v>
                 </c:pt>
                 <c:pt idx="35">
-                  <c:v>486888</c:v>
+                  <c:v>520677</c:v>
                 </c:pt>
                 <c:pt idx="36">
-                  <c:v>487818</c:v>
+                  <c:v>520677</c:v>
                 </c:pt>
                 <c:pt idx="37">
-                  <c:v>490007</c:v>
+                  <c:v>523330</c:v>
                 </c:pt>
                 <c:pt idx="38">
-                  <c:v>492196</c:v>
+                  <c:v>525983</c:v>
                 </c:pt>
                 <c:pt idx="39">
-                  <c:v>494385</c:v>
+                  <c:v>528636</c:v>
                 </c:pt>
                 <c:pt idx="40">
-                  <c:v>496574</c:v>
+                  <c:v>531289</c:v>
                 </c:pt>
                 <c:pt idx="41">
-                  <c:v>498763</c:v>
+                  <c:v>533942</c:v>
                 </c:pt>
                 <c:pt idx="42">
-                  <c:v>499693</c:v>
+                  <c:v>533942</c:v>
                 </c:pt>
                 <c:pt idx="43">
-                  <c:v>500623</c:v>
+                  <c:v>533942</c:v>
                 </c:pt>
                 <c:pt idx="44">
-                  <c:v>502812</c:v>
+                  <c:v>536595</c:v>
                 </c:pt>
                 <c:pt idx="45">
-                  <c:v>481738</c:v>
+                  <c:v>513659</c:v>
                 </c:pt>
                 <c:pt idx="46">
-                  <c:v>483927</c:v>
+                  <c:v>516312</c:v>
                 </c:pt>
                 <c:pt idx="47">
-                  <c:v>437641</c:v>
+                  <c:v>481632</c:v>
                 </c:pt>
                 <c:pt idx="48">
-                  <c:v>439830</c:v>
+                  <c:v>484285</c:v>
                 </c:pt>
                 <c:pt idx="49">
-                  <c:v>482360</c:v>
+                  <c:v>484285</c:v>
                 </c:pt>
                 <c:pt idx="50">
-                  <c:v>483290</c:v>
+                  <c:v>484285</c:v>
                 </c:pt>
                 <c:pt idx="51">
-                  <c:v>485479</c:v>
+                  <c:v>532698</c:v>
                 </c:pt>
                 <c:pt idx="52">
-                  <c:v>487668</c:v>
+                  <c:v>535351</c:v>
                 </c:pt>
                 <c:pt idx="53">
-                  <c:v>489857</c:v>
+                  <c:v>538004</c:v>
                 </c:pt>
                 <c:pt idx="54">
-                  <c:v>492046</c:v>
+                  <c:v>540657</c:v>
                 </c:pt>
                 <c:pt idx="55">
-                  <c:v>494235</c:v>
+                  <c:v>543310</c:v>
                 </c:pt>
                 <c:pt idx="56">
-                  <c:v>495165</c:v>
+                  <c:v>543310</c:v>
                 </c:pt>
                 <c:pt idx="57">
-                  <c:v>496095</c:v>
+                  <c:v>543310</c:v>
                 </c:pt>
                 <c:pt idx="58">
-                  <c:v>498284</c:v>
+                  <c:v>545963</c:v>
                 </c:pt>
                 <c:pt idx="59">
-                  <c:v>500473</c:v>
+                  <c:v>548616</c:v>
                 </c:pt>
                 <c:pt idx="60">
-                  <c:v>480780</c:v>
+                  <c:v>527060</c:v>
                 </c:pt>
               </c:numCache>
             </c:numRef>
@@ -1037,7 +1037,7 @@
           <a:lstStyle/>
           <a:p>
             <a:r>
-              <a:t>How many months of runway do we have?. Sample Community Services Ltd. Period: September 2026. How long the organisation could keep going on its own money: cash at bank, less unspent grant money (which belongs to the funders' programs), divided by a month's spending.</a:t>
+              <a:t>How many months of runway do we have?. Sample Community Services Ltd. Period: September 2026. How long the organisation could keep going on its own money: cash at bank, less unspent grant money (which belongs to the funders' programs) and GST and PAYG owed to the ATO, divided by a month's spending.</a:t>
             </a:r>
           </a:p>
         </p:txBody>
@@ -1107,7 +1107,7 @@
           <a:lstStyle/>
           <a:p>
             <a:r>
-              <a:t>How many months of runway do we have?. Runway now: 2.0 months; Target: 3.0 months; Gap: $164,020; Runway in August: 2.2 months. Unrestricted cash ($324,680, after setting aside unspent grant money) would cover 2.0 months of spending at September's rate of spending, short of the 3.0 months target by $164,020. A reserves plan is the usual next step: how much of each month's surplus goes to reserves, and by when the gap is closed.</a:t>
+              <a:t>How many months of runway do we have?. Runway now: 1.9 months; Target: 3.0 months; Gap: $183,263; Runway in August: 1.9 months. Unrestricted cash ($305,437, after setting aside unspent grant money) would cover 1.9 months of spending at September's rate of spending, short of the 3.0 months target by $183,263. A reserves plan is the usual next step: how much of each month's surplus goes to reserves, and by when the gap is closed.</a:t>
             </a:r>
           </a:p>
         </p:txBody>
@@ -4357,7 +4357,7 @@
                 </a:solidFill>
                 <a:latin typeface="Roboto"/>
               </a:rPr>
-              <a:t>Period: September 2026. How long the organisation could keep going on its own money: cash at bank, less unspent grant money (which belongs to the funders' programs), divided by a month's spending.</a:t>
+              <a:t>Period: September 2026. How long the organisation could keep going on its own money: cash at bank, less unspent grant money (which belongs to the funders' programs) and GST and PAYG owed to the ATO, divided by a month's spending.</a:t>
             </a:r>
           </a:p>
         </p:txBody>
@@ -4522,7 +4522,7 @@
                 </a:solidFill>
                 <a:latin typeface="Roboto"/>
               </a:rPr>
-              <a:t>Data retrieved 2pm, Tue 6 Oct 2026 · Generated 8 Oct 2026, 9:35am · Sample data · Made with Python (python-pptx)</a:t>
+              <a:t>Data retrieved 2pm, Tue 6 Oct 2026 · Generated 9 Oct 2026, 8:56am · Sample data · Made with Python (python-pptx)</a:t>
             </a:r>
           </a:p>
         </p:txBody>
@@ -4868,7 +4868,7 @@
                 </a:solidFill>
                 <a:latin typeface="Roboto"/>
               </a:rPr>
-              <a:t>2.0 months</a:t>
+              <a:t>1.9 months</a:t>
             </a:r>
           </a:p>
         </p:txBody>
@@ -5200,7 +5200,7 @@
                 </a:solidFill>
                 <a:latin typeface="Roboto"/>
               </a:rPr>
-              <a:t>$164,020</a:t>
+              <a:t>$183,263</a:t>
             </a:r>
           </a:p>
         </p:txBody>
@@ -5366,7 +5366,7 @@
                 </a:solidFill>
                 <a:latin typeface="Roboto"/>
               </a:rPr>
-              <a:t>2.2 months</a:t>
+              <a:t>1.9 months</a:t>
             </a:r>
           </a:p>
         </p:txBody>
@@ -5436,7 +5436,7 @@
         </p:nvCxnSpPr>
         <p:spPr>
           <a:xfrm>
-            <a:off x="1697702" y="3120824"/>
+            <a:off x="1697702" y="2955960"/>
             <a:ext cx="9698474" cy="0"/>
           </a:xfrm>
           <a:prstGeom prst="line">
@@ -5472,7 +5472,7 @@
         </p:nvSpPr>
         <p:spPr>
           <a:xfrm>
-            <a:off x="5909776" y="2846504"/>
+            <a:off x="5909776" y="2681640"/>
             <a:ext cx="5486400" cy="237744"/>
           </a:xfrm>
           <a:prstGeom prst="rect">
@@ -5498,7 +5498,7 @@
                 </a:solidFill>
                 <a:latin typeface="Roboto"/>
               </a:rPr>
-              <a:t>Reserves target $644,800: 3.0 months of spending + unspent grant money</a:t>
+              <a:t>Reserves target $710,323: 3.0 months of spending + unspent grant money + what's owed to the ATO</a:t>
             </a:r>
           </a:p>
         </p:txBody>
@@ -5625,7 +5625,7 @@
                 </a:solidFill>
                 <a:latin typeface="Roboto"/>
               </a:rPr>
-              <a:t>Unrestricted cash ($324,680, after setting aside unspent grant money) would cover 2.0 months of spending at September's rate of spending, short of the 3.0 months target by $164,020.</a:t>
+              <a:t>Unrestricted cash ($305,437, after setting aside unspent grant money) would cover 1.9 months of spending at September's rate of spending, short of the 3.0 months target by $183,263.</a:t>
             </a:r>
           </a:p>
         </p:txBody>
@@ -5830,7 +5830,7 @@
                 </a:solidFill>
                 <a:latin typeface="Roboto"/>
               </a:rPr>
-              <a:t>Data retrieved 2pm, Tue 6 Oct 2026 · Generated 8 Oct 2026, 9:35am · Sample data · Made with Python (python-pptx)</a:t>
+              <a:t>Data retrieved 2pm, Tue 6 Oct 2026 · Generated 9 Oct 2026, 8:56am · Sample data · Made with Python (python-pptx)</a:t>
             </a:r>
           </a:p>
         </p:txBody>

--- a/media/exports/reports/2026-09/runway.pptx
+++ b/media/exports/reports/2026-09/runway.pptx
@@ -1037,7 +1037,7 @@
           <a:lstStyle/>
           <a:p>
             <a:r>
-              <a:t>How many months of runway do we have?. Sample Community Services Ltd. Period: September 2026. How long the organisation could keep going on its own money: cash at bank, less unspent grant money (which belongs to the funders' programs) and GST and PAYG owed to the ATO, divided by a month's spending.</a:t>
+              <a:t>How many months of runway do we have?. Sample Community Services Ltd. Period: September 2026. In short: 1.9 months of spending in unrestricted cash, against a 3.0 months reserves target. How long the organisation could keep going on its own money: cash at bank, less unspent grant money (which belongs to the funders' programs) and GST and PAYG owed to the ATO, divided by a month's spending.</a:t>
             </a:r>
           </a:p>
         </p:txBody>
@@ -4332,7 +4332,7 @@
         <p:spPr>
           <a:xfrm>
             <a:off x="457200" y="3703320"/>
-            <a:ext cx="11277295" cy="535940"/>
+            <a:ext cx="11277295" cy="758190"/>
           </a:xfrm>
           <a:prstGeom prst="rect">
             <a:avLst/>
@@ -4357,7 +4357,7 @@
                 </a:solidFill>
                 <a:latin typeface="Roboto"/>
               </a:rPr>
-              <a:t>Period: September 2026. How long the organisation could keep going on its own money: cash at bank, less unspent grant money (which belongs to the funders' programs) and GST and PAYG owed to the ATO, divided by a month's spending.</a:t>
+              <a:t>Period: September 2026. In short: 1.9 months of spending in unrestricted cash, against a 3.0 months reserves target. How long the organisation could keep going on its own money: cash at bank, less unspent grant money (which belongs to the funders' programs) and GST and PAYG owed to the ATO, divided by a month's spending.</a:t>
             </a:r>
           </a:p>
         </p:txBody>
@@ -4370,7 +4370,7 @@
         </p:nvSpPr>
         <p:spPr>
           <a:xfrm>
-            <a:off x="457200" y="4330700"/>
+            <a:off x="457200" y="4552950"/>
             <a:ext cx="11277295" cy="1097280"/>
           </a:xfrm>
           <a:prstGeom prst="rect">
@@ -4522,7 +4522,7 @@
                 </a:solidFill>
                 <a:latin typeface="Roboto"/>
               </a:rPr>
-              <a:t>Data retrieved 2pm, Tue 6 Oct 2026 · Generated 9 Oct 2026, 8:56am · Sample data · Made with Python (python-pptx)</a:t>
+              <a:t>Data retrieved 2pm, Tue 6 Oct 2026 · Generated 10 Oct 2026, 9:55pm · Sample data · Made with Python (python-pptx)</a:t>
             </a:r>
           </a:p>
         </p:txBody>
@@ -5830,7 +5830,7 @@
                 </a:solidFill>
                 <a:latin typeface="Roboto"/>
               </a:rPr>
-              <a:t>Data retrieved 2pm, Tue 6 Oct 2026 · Generated 9 Oct 2026, 8:56am · Sample data · Made with Python (python-pptx)</a:t>
+              <a:t>Data retrieved 2pm, Tue 6 Oct 2026 · Generated 10 Oct 2026, 9:55pm · Sample data · Made with Python (python-pptx)</a:t>
             </a:r>
           </a:p>
         </p:txBody>
